--- a/05. DOCUMENTACIÓN/MANUAL_SOAP_DOTNET_GRXX.pptx
+++ b/05. DOCUMENTACIÓN/MANUAL_SOAP_DOTNET_GRXX.pptx
@@ -18,9 +18,10 @@
     <p:sldId id="266" r:id="rId12"/>
     <p:sldId id="267" r:id="rId13"/>
     <p:sldId id="268" r:id="rId14"/>
+    <p:sldId id="269" r:id="rId15"/>
   </p:sldIdLst>
   <p:notesMasterIdLst>
-    <p:notesMasterId r:id="rId15"/>
+    <p:notesMasterId r:id="rId16"/>
   </p:notesMasterIdLst>
   <p:sldSz cx="12192000" cy="6858000"/>
   <p:notesSz cx="6858000" cy="12192000"/>
@@ -119,12 +120,12 @@
   <p:extLst>
     <p:ext uri="{521415D9-36F7-43E2-AB2F-B90AF26B5E84}">
       <p14:sectionLst xmlns:p14="http://schemas.microsoft.com/office/powerpoint/2010/main">
-        <p14:section name="Inicio" id="{73999e03-48e7-cde9-ecfb-4d62311b7404}">
+        <p14:section name="Inicio" id="{f5c6bb91-0e32-b2dd-5f81-e10f11d7a6d0}">
           <p14:sldIdLst>
             <p14:sldId id="256"/>
           </p14:sldIdLst>
         </p14:section>
-        <p14:section name="Solución" id="{efa5d2f5-a464-0798-92cc-82a16ba81436}">
+        <p14:section name="Solución" id="{c9f965bf-5839-6057-7111-0a93333a8d86}">
           <p14:sldIdLst>
             <p14:sldId id="257"/>
             <p14:sldId id="258"/>
@@ -133,23 +134,24 @@
             <p14:sldId id="261"/>
           </p14:sldIdLst>
         </p14:section>
-        <p14:section name="Clientes" id="{3f7b6a5b-8936-9734-3e8e-c696ebf117ce}">
+        <p14:section name="Clientes" id="{2e5837ca-f41e-f4c3-a088-6fd14fc61cb1}">
           <p14:sldIdLst>
             <p14:sldId id="262"/>
             <p14:sldId id="263"/>
             <p14:sldId id="264"/>
             <p14:sldId id="265"/>
+            <p14:sldId id="266"/>
           </p14:sldIdLst>
         </p14:section>
-        <p14:section name="Calidad" id="{7146efa9-463a-1b7d-47b8-686824a869ec}">
+        <p14:section name="Calidad" id="{78d7632e-2bc1-dc6b-4f7f-0325a5b90319}">
           <p14:sldIdLst>
-            <p14:sldId id="266"/>
             <p14:sldId id="267"/>
+            <p14:sldId id="268"/>
           </p14:sldIdLst>
         </p14:section>
-        <p14:section name="Cierre" id="{1b594a76-f972-9ed0-62a2-e2a1c8f129ab}">
+        <p14:section name="Cierre" id="{7f151eec-c6ad-479c-c9d5-d9ea6e18260f}">
           <p14:sldIdLst>
-            <p14:sldId id="268"/>
+            <p14:sldId id="269"/>
           </p14:sldIdLst>
         </p14:section>
       </p14:sectionLst>
@@ -644,7 +646,7 @@
           <a:p>
             <a:r>
               <a:rPr lang="en-US" dirty="0"/>
-              <a:t>Mostrar aquí la app ejecutándose en el emulador.</a:t>
+              <a:t>Aplicación MAUI instalada en una tablet Samsung; se conecta al servidor IIS por la IP de la PC.</a:t>
             </a:r>
             <a:endParaRPr lang="en-US" dirty="0"/>
           </a:p>
@@ -732,7 +734,7 @@
           <a:p>
             <a:r>
               <a:rPr lang="en-US" dirty="0"/>
-              <a:t>Detalle en el ECUD: actores, flujos básicos y alternos de cada caso.</a:t>
+              <a:t>Cada integrante usa su propio equipo; el servidor se publica en IIS y los clientes apuntan a la IP de la PC del servidor.</a:t>
             </a:r>
             <a:endParaRPr lang="en-US" dirty="0"/>
           </a:p>
@@ -820,7 +822,7 @@
           <a:p>
             <a:r>
               <a:rPr lang="en-US" dirty="0"/>
-              <a:t>Todas las pruebas se ejecutaron contra el servidor real en IIS Express.</a:t>
+              <a:t>Detalle en el ECUD: actores, flujos básicos y alternos de cada caso.</a:t>
             </a:r>
             <a:endParaRPr lang="en-US" dirty="0"/>
           </a:p>
@@ -908,7 +910,7 @@
           <a:p>
             <a:r>
               <a:rPr lang="en-US" dirty="0"/>
-              <a:t>Cierre y preguntas.</a:t>
+              <a:t>Las pruebas se ejecutaron con IIS Express y luego en red: servidor en IIS y cada integrante en su propio equipo.</a:t>
             </a:r>
             <a:endParaRPr lang="en-US" dirty="0"/>
           </a:p>
@@ -932,6 +934,94 @@
             <a:fld id="{F7021451-1387-4CA6-816F-3879F97B5CBC}" type="slidenum">
               <a:rPr lang="en-US"/>
               <a:t>13</a:t>
+            </a:fld>
+            <a:endParaRPr lang="en-US"/>
+          </a:p>
+        </p:txBody>
+      </p:sp>
+    </p:spTree>
+    <p:extLst>
+      <p:ext uri="{BB962C8B-B14F-4D97-AF65-F5344CB8AC3E}">
+        <p14:creationId xmlns:p14="http://schemas.microsoft.com/office/powerpoint/2010/main" val="1024086991"/>
+      </p:ext>
+    </p:extLst>
+  </p:cSld>
+  <p:clrMapOvr>
+    <a:masterClrMapping/>
+  </p:clrMapOvr>
+</p:notes>
+</file>
+
+<file path=ppt/notesSlides/notesSlide14.xml><?xml version="1.0" encoding="utf-8"?>
+<p:notes xmlns:a="http://schemas.openxmlformats.org/drawingml/2006/main" xmlns:r="http://schemas.openxmlformats.org/officeDocument/2006/relationships" xmlns:p="http://schemas.openxmlformats.org/presentationml/2006/main">
+  <p:cSld>
+    <p:spTree>
+      <p:nvGrpSpPr>
+        <p:cNvPr id="1" name=""/>
+        <p:cNvGrpSpPr/>
+        <p:nvPr/>
+      </p:nvGrpSpPr>
+      <p:grpSpPr>
+        <a:xfrm>
+          <a:off x="0" y="0"/>
+          <a:ext cx="0" cy="0"/>
+          <a:chOff x="0" y="0"/>
+          <a:chExt cx="0" cy="0"/>
+        </a:xfrm>
+      </p:grpSpPr>
+      <p:sp>
+        <p:nvSpPr>
+          <p:cNvPr id="2" name="Slide Image Placeholder 1"/>
+          <p:cNvSpPr>
+            <a:spLocks noGrp="1" noRot="1" noChangeAspect="1"/>
+          </p:cNvSpPr>
+          <p:nvPr>
+            <p:ph type="sldImg"/>
+          </p:nvPr>
+        </p:nvSpPr>
+        <p:spPr/>
+      </p:sp>
+      <p:sp>
+        <p:nvSpPr>
+          <p:cNvPr id="3" name="Notes Placeholder 2"/>
+          <p:cNvSpPr>
+            <a:spLocks noGrp="1"/>
+          </p:cNvSpPr>
+          <p:nvPr>
+            <p:ph type="body" idx="1"/>
+          </p:nvPr>
+        </p:nvSpPr>
+        <p:spPr/>
+        <p:txBody>
+          <a:bodyPr/>
+          <a:lstStyle/>
+          <a:p>
+            <a:r>
+              <a:rPr lang="en-US" dirty="0"/>
+              <a:t>Cierre y preguntas.</a:t>
+            </a:r>
+            <a:endParaRPr lang="en-US" dirty="0"/>
+          </a:p>
+        </p:txBody>
+      </p:sp>
+      <p:sp>
+        <p:nvSpPr>
+          <p:cNvPr id="4" name="Slide Number Placeholder 3"/>
+          <p:cNvSpPr>
+            <a:spLocks noGrp="1"/>
+          </p:cNvSpPr>
+          <p:nvPr>
+            <p:ph type="sldNum" sz="quarter" idx="10"/>
+          </p:nvPr>
+        </p:nvSpPr>
+        <p:spPr/>
+        <p:txBody>
+          <a:bodyPr/>
+          <a:lstStyle/>
+          <a:p>
+            <a:fld id="{F7021451-1387-4CA6-816F-3879F97B5CBC}" type="slidenum">
+              <a:rPr lang="en-US"/>
+              <a:t>14</a:t>
             </a:fld>
             <a:endParaRPr lang="en-US"/>
           </a:p>
@@ -1734,7 +1824,7 @@
               <a:buNone/>
               <a:defRPr lang="en-US" sz="4000" b="1" dirty="0">
                 <a:solidFill>
-                  <a:schemeClr val="bg1"/>
+                  <a:srgbClr val="FFFFFF"/>
                 </a:solidFill>
               </a:defRPr>
             </a:lvl1pPr>
@@ -1805,7 +1895,7 @@
               <a:buNone/>
               <a:defRPr lang="en-US" sz="4000" b="1" dirty="0">
                 <a:solidFill>
-                  <a:schemeClr val="bg1"/>
+                  <a:srgbClr val="FFFFFF"/>
                 </a:solidFill>
               </a:defRPr>
             </a:lvl1pPr>
@@ -1876,7 +1966,7 @@
               <a:buNone/>
               <a:defRPr lang="en-US" sz="3400" b="1" dirty="0">
                 <a:solidFill>
-                  <a:schemeClr val="tx2"/>
+                  <a:srgbClr val="004A38"/>
                 </a:solidFill>
               </a:defRPr>
             </a:lvl1pPr>
@@ -1916,7 +2006,7 @@
             <a:r>
               <a:rPr lang="en-US" sz="1000" dirty="0">
                 <a:solidFill>
-                  <a:schemeClr val="accent6"/>
+                  <a:srgbClr val="6C757D"/>
                 </a:solidFill>
               </a:rPr>
               <a:t>ESPE · Arquitectura de Software · Conversor de Unidades SOAP .NET</a:t>
@@ -1955,7 +2045,7 @@
             <a:lvl1pPr>
               <a:defRPr sz="1000">
                 <a:solidFill>
-                  <a:schemeClr val="accent6"/>
+                  <a:srgbClr val="6C757D"/>
                 </a:solidFill>
               </a:defRPr>
             </a:lvl1pPr>
@@ -2025,7 +2115,7 @@
             <a:lvl1pPr>
               <a:defRPr sz="1000">
                 <a:solidFill>
-                  <a:schemeClr val="accent6"/>
+                  <a:srgbClr val="6C757D"/>
                 </a:solidFill>
               </a:defRPr>
             </a:lvl1pPr>
@@ -2335,11 +2425,11 @@
             <a:avLst/>
           </a:prstGeom>
           <a:solidFill>
-            <a:schemeClr val="accent1"/>
+            <a:srgbClr val="006950"/>
           </a:solidFill>
           <a:ln w="12700">
             <a:solidFill>
-              <a:schemeClr val="accent1"/>
+              <a:srgbClr val="006950"/>
             </a:solidFill>
             <a:prstDash val="solid"/>
           </a:ln>
@@ -2372,8 +2462,11 @@
             <a:r>
               <a:rPr lang="en-US" sz="3000" b="1" dirty="0">
                 <a:solidFill>
-                  <a:schemeClr val="bg1"/>
-                </a:solidFill>
+                  <a:srgbClr val="FFFFFF"/>
+                </a:solidFill>
+                <a:latin typeface="Calibri" pitchFamily="34" charset="0"/>
+                <a:ea typeface="Calibri" pitchFamily="34" charset="-122"/>
+                <a:cs typeface="Calibri" pitchFamily="34" charset="-120"/>
               </a:rPr>
               <a:t>⇄</a:t>
             </a:r>
@@ -2410,6 +2503,9 @@
                 <a:solidFill>
                   <a:srgbClr val="BEE1D7"/>
                 </a:solidFill>
+                <a:latin typeface="Calibri" pitchFamily="34" charset="0"/>
+                <a:ea typeface="Calibri" pitchFamily="34" charset="-122"/>
+                <a:cs typeface="Calibri" pitchFamily="34" charset="-120"/>
               </a:rPr>
               <a:t>UNIVERSIDAD DE LAS FUERZAS ARMADAS ESPE · ARQUITECTURA DE SOFTWARE</a:t>
             </a:r>
@@ -2446,8 +2542,11 @@
                 <a:solidFill>
                   <a:srgbClr val="BEE1D7"/>
                 </a:solidFill>
-              </a:rPr>
-              <a:t>TI.1.2 · PAO 2026-50 · NRC XXXXX · Grupo XX</a:t>
+                <a:latin typeface="Calibri" pitchFamily="34" charset="0"/>
+                <a:ea typeface="Calibri" pitchFamily="34" charset="-122"/>
+                <a:cs typeface="Calibri" pitchFamily="34" charset="-120"/>
+              </a:rPr>
+              <a:t>TI.1.2 · PAO 2026-51 · NRC 36884 · Grupo 1</a:t>
             </a:r>
             <a:endParaRPr lang="en-US" sz="1400" dirty="0"/>
           </a:p>
@@ -2482,8 +2581,11 @@
             <a:r>
               <a:rPr lang="en-US" sz="4000" b="1" dirty="0">
                 <a:solidFill>
-                  <a:schemeClr val="bg1"/>
-                </a:solidFill>
+                  <a:srgbClr val="FFFFFF"/>
+                </a:solidFill>
+                <a:latin typeface="Calibri" pitchFamily="34" charset="0"/>
+                <a:ea typeface="Calibri" pitchFamily="34" charset="-122"/>
+                <a:cs typeface="Calibri" pitchFamily="34" charset="-120"/>
               </a:rPr>
               <a:t>Conversor de Unidades SOAP .NET</a:t>
             </a:r>
@@ -2518,8 +2620,11 @@
             <a:r>
               <a:rPr lang="en-US" sz="2000" dirty="0">
                 <a:solidFill>
-                  <a:schemeClr val="bg1"/>
-                </a:solidFill>
+                  <a:srgbClr val="FFFFFF"/>
+                </a:solidFill>
+                <a:latin typeface="Calibri" pitchFamily="34" charset="0"/>
+                <a:ea typeface="Calibri" pitchFamily="34" charset="-122"/>
+                <a:cs typeface="Calibri" pitchFamily="34" charset="-120"/>
               </a:rPr>
               <a:t>Servicio web SOAP sin base de datos para temperatura, longitud y masa, con clientes de consola, escritorio, web y móvil</a:t>
             </a:r>
@@ -2559,6 +2664,9 @@
                 <a:solidFill>
                   <a:srgbClr val="BEE1D7"/>
                 </a:solidFill>
+                <a:latin typeface="Calibri" pitchFamily="34" charset="0"/>
+                <a:ea typeface="Calibri" pitchFamily="34" charset="-122"/>
+                <a:cs typeface="Calibri" pitchFamily="34" charset="-120"/>
               </a:rPr>
               <a:t>Integrantes: </a:t>
             </a:r>
@@ -2573,8 +2681,11 @@
                 <a:solidFill>
                   <a:srgbClr val="BEE1D7"/>
                 </a:solidFill>
-              </a:rPr>
-              <a:t>[Integrante 1] · [Integrante 2] · [Integrante 3]</a:t>
+                <a:latin typeface="Calibri" pitchFamily="34" charset="0"/>
+                <a:ea typeface="Calibri" pitchFamily="34" charset="-122"/>
+                <a:cs typeface="Calibri" pitchFamily="34" charset="-120"/>
+              </a:rPr>
+              <a:t>Wilmer Buestan · Jefferson Masapanta · Moises Benalcazar</a:t>
             </a:r>
             <a:endParaRPr lang="en-US" sz="1600" dirty="0"/>
           </a:p>
@@ -2590,6 +2701,9 @@
                 <a:solidFill>
                   <a:srgbClr val="BEE1D7"/>
                 </a:solidFill>
+                <a:latin typeface="Calibri" pitchFamily="34" charset="0"/>
+                <a:ea typeface="Calibri" pitchFamily="34" charset="-122"/>
+                <a:cs typeface="Calibri" pitchFamily="34" charset="-120"/>
               </a:rPr>
               <a:t>Tutor: </a:t>
             </a:r>
@@ -2604,6 +2718,9 @@
                 <a:solidFill>
                   <a:srgbClr val="BEE1D7"/>
                 </a:solidFill>
+                <a:latin typeface="Calibri" pitchFamily="34" charset="0"/>
+                <a:ea typeface="Calibri" pitchFamily="34" charset="-122"/>
+                <a:cs typeface="Calibri" pitchFamily="34" charset="-120"/>
               </a:rPr>
               <a:t>Ing. Eduardo Mauricio Campaña Ortega</a:t>
             </a:r>
@@ -2621,6 +2738,9 @@
                 <a:solidFill>
                   <a:srgbClr val="BEE1D7"/>
                 </a:solidFill>
+                <a:latin typeface="Calibri" pitchFamily="34" charset="0"/>
+                <a:ea typeface="Calibri" pitchFamily="34" charset="-122"/>
+                <a:cs typeface="Calibri" pitchFamily="34" charset="-120"/>
               </a:rPr>
               <a:t>Fecha: </a:t>
             </a:r>
@@ -2635,8 +2755,11 @@
                 <a:solidFill>
                   <a:srgbClr val="BEE1D7"/>
                 </a:solidFill>
-              </a:rPr>
-              <a:t>17/10/2026</a:t>
+                <a:latin typeface="Calibri" pitchFamily="34" charset="0"/>
+                <a:ea typeface="Calibri" pitchFamily="34" charset="-122"/>
+                <a:cs typeface="Calibri" pitchFamily="34" charset="-120"/>
+              </a:rPr>
+              <a:t>28/10/2026</a:t>
             </a:r>
             <a:endParaRPr lang="en-US" sz="1600" dirty="0"/>
           </a:p>
@@ -2696,8 +2819,11 @@
             <a:r>
               <a:rPr lang="en-US" sz="3400" b="1" dirty="0">
                 <a:solidFill>
-                  <a:schemeClr val="tx2"/>
-                </a:solidFill>
+                  <a:srgbClr val="004A38"/>
+                </a:solidFill>
+                <a:latin typeface="Calibri" pitchFamily="34" charset="0"/>
+                <a:ea typeface="Calibri" pitchFamily="34" charset="-122"/>
+                <a:cs typeface="Calibri" pitchFamily="34" charset="-120"/>
               </a:rPr>
               <a:t>Cliente móvil · CLIMOV</a:t>
             </a:r>
@@ -2732,10 +2858,13 @@
             <a:r>
               <a:rPr lang="en-US" sz="1600" b="1" dirty="0">
                 <a:solidFill>
-                  <a:schemeClr val="accent4"/>
-                </a:solidFill>
-              </a:rPr>
-              <a:t>Android · Kotlin · corrutinas · sin librerías SOAP externas</a:t>
+                  <a:srgbClr val="7C3AAD"/>
+                </a:solidFill>
+                <a:latin typeface="Calibri" pitchFamily="34" charset="0"/>
+                <a:ea typeface="Calibri" pitchFamily="34" charset="-122"/>
+                <a:cs typeface="Calibri" pitchFamily="34" charset="-120"/>
+              </a:rPr>
+              <a:t>.NET MAUI (sucesor de Xamarin) · C# · Android · HttpClient</a:t>
             </a:r>
             <a:endParaRPr lang="en-US" sz="1600" dirty="0"/>
           </a:p>
@@ -2772,10 +2901,13 @@
             <a:r>
               <a:rPr lang="en-US" sz="1500" dirty="0">
                 <a:solidFill>
-                  <a:schemeClr val="tx1"/>
-                </a:solidFill>
-              </a:rPr>
-              <a:t>El sobre SOAP se arma a mano</a:t>
+                  <a:srgbClr val="212529"/>
+                </a:solidFill>
+                <a:latin typeface="Calibri" pitchFamily="34" charset="0"/>
+                <a:ea typeface="Calibri" pitchFamily="34" charset="-122"/>
+                <a:cs typeface="Calibri" pitchFamily="34" charset="-120"/>
+              </a:rPr>
+              <a:t>Probado en una tablet real por WiFi</a:t>
             </a:r>
             <a:endParaRPr lang="en-US" sz="1500" dirty="0"/>
           </a:p>
@@ -2790,10 +2922,13 @@
             <a:r>
               <a:rPr lang="en-US" sz="1500" dirty="0">
                 <a:solidFill>
-                  <a:schemeClr val="tx1"/>
-                </a:solidFill>
-              </a:rPr>
-              <a:t>XmlPullParser lee el resultado o el Fault</a:t>
+                  <a:srgbClr val="212529"/>
+                </a:solidFill>
+                <a:latin typeface="Calibri" pitchFamily="34" charset="0"/>
+                <a:ea typeface="Calibri" pitchFamily="34" charset="-122"/>
+                <a:cs typeface="Calibri" pitchFamily="34" charset="-120"/>
+              </a:rPr>
+              <a:t>Sobre SOAP armado a mano + SOAPAction</a:t>
             </a:r>
             <a:endParaRPr lang="en-US" sz="1500" dirty="0"/>
           </a:p>
@@ -2808,10 +2943,13 @@
             <a:r>
               <a:rPr lang="en-US" sz="1500" dirty="0">
                 <a:solidFill>
-                  <a:schemeClr val="tx1"/>
-                </a:solidFill>
-              </a:rPr>
-              <a:t>Servidor configurable desde la app</a:t>
+                  <a:srgbClr val="212529"/>
+                </a:solidFill>
+                <a:latin typeface="Calibri" pitchFamily="34" charset="0"/>
+                <a:ea typeface="Calibri" pitchFamily="34" charset="-122"/>
+                <a:cs typeface="Calibri" pitchFamily="34" charset="-120"/>
+              </a:rPr>
+              <a:t>XDocument lee el resultado o el Fault</a:t>
             </a:r>
             <a:endParaRPr lang="en-US" sz="1500" dirty="0"/>
           </a:p>
@@ -2826,10 +2964,13 @@
             <a:r>
               <a:rPr lang="en-US" sz="1500" dirty="0">
                 <a:solidFill>
-                  <a:schemeClr val="tx1"/>
-                </a:solidFill>
-              </a:rPr>
-              <a:t>Pestañas por categoría y botón ⇅</a:t>
+                  <a:srgbClr val="212529"/>
+                </a:solidFill>
+                <a:latin typeface="Calibri" pitchFamily="34" charset="0"/>
+                <a:ea typeface="Calibri" pitchFamily="34" charset="-122"/>
+                <a:cs typeface="Calibri" pitchFamily="34" charset="-120"/>
+              </a:rPr>
+              <a:t>Singleton: ClienteSoap y Controlador</a:t>
             </a:r>
             <a:endParaRPr lang="en-US" sz="1500" dirty="0"/>
           </a:p>
@@ -2844,10 +2985,13 @@
             <a:r>
               <a:rPr lang="en-US" sz="1500" dirty="0">
                 <a:solidFill>
-                  <a:schemeClr val="tx1"/>
-                </a:solidFill>
-              </a:rPr>
-              <a:t>Emulador: http://10.0.2.2:8085</a:t>
+                  <a:srgbClr val="212529"/>
+                </a:solidFill>
+                <a:latin typeface="Calibri" pitchFamily="34" charset="0"/>
+                <a:ea typeface="Calibri" pitchFamily="34" charset="-122"/>
+                <a:cs typeface="Calibri" pitchFamily="34" charset="-120"/>
+              </a:rPr>
+              <a:t>URL del servidor guardada en la app</a:t>
             </a:r>
             <a:endParaRPr lang="en-US" sz="1500" dirty="0"/>
           </a:p>
@@ -2855,22 +2999,20 @@
       </p:sp>
       <p:sp>
         <p:nvSpPr>
-          <p:cNvPr id="6" name="Caja código móvil"/>
+          <p:cNvPr id="6" name="Marco Móvil en la tablet"/>
           <p:cNvSpPr/>
           <p:nvPr/>
         </p:nvSpPr>
         <p:spPr>
           <a:xfrm>
-            <a:off x="4389120" y="1691640"/>
-            <a:ext cx="4206240" cy="3931920"/>
-          </a:xfrm>
-          <a:prstGeom prst="roundRect">
-            <a:avLst>
-              <a:gd name="adj" fmla="val 2326"/>
-            </a:avLst>
+            <a:off x="5548884" y="1152144"/>
+            <a:ext cx="4949952" cy="2999232"/>
+          </a:xfrm>
+          <a:prstGeom prst="rect">
+            <a:avLst/>
           </a:prstGeom>
           <a:solidFill>
-            <a:schemeClr val="bg2"/>
+            <a:srgbClr val="FFFFFF"/>
           </a:solidFill>
           <a:ln w="12700">
             <a:solidFill>
@@ -2878,18 +3020,76 @@
             </a:solidFill>
             <a:prstDash val="solid"/>
           </a:ln>
-        </p:spPr>
-      </p:sp>
-      <p:sp>
-        <p:nvSpPr>
-          <p:cNvPr id="7" name="Text 4"/>
+          <a:effectLst>
+            <a:outerShdw sx="100000" sy="100000" kx="0" ky="0" algn="bl" rotWithShape="0" blurRad="76200" dist="25400" dir="5400000">
+              <a:srgbClr val="000000">
+                <a:alpha val="18000"/>
+              </a:srgbClr>
+            </a:outerShdw>
+          </a:effectLst>
+        </p:spPr>
+      </p:sp>
+      <p:pic>
+        <p:nvPicPr>
+          <p:cNvPr id="7" name="Móvil en la tablet" descr="Móvil en la tablet">    </p:cNvPr>
+          <p:cNvPicPr>
+            <a:picLocks noChangeAspect="1"/>
+          </p:cNvPicPr>
+          <p:nvPr/>
+        </p:nvPicPr>
+        <p:blipFill>
+          <a:blip r:embed="rId1"/>
+          <a:stretch>
+            <a:fillRect/>
+          </a:stretch>
+        </p:blipFill>
+        <p:spPr>
+          <a:xfrm>
+            <a:off x="5585460" y="1188720"/>
+            <a:ext cx="4876800" cy="2926080"/>
+          </a:xfrm>
+          <a:prstGeom prst="rect">
+            <a:avLst/>
+          </a:prstGeom>
+        </p:spPr>
+      </p:pic>
+      <p:sp>
+        <p:nvSpPr>
+          <p:cNvPr id="8" name="Caja código móvil"/>
+          <p:cNvSpPr/>
+          <p:nvPr/>
+        </p:nvSpPr>
+        <p:spPr>
+          <a:xfrm>
+            <a:off x="4389120" y="4297680"/>
+            <a:ext cx="7269480" cy="1920240"/>
+          </a:xfrm>
+          <a:prstGeom prst="roundRect">
+            <a:avLst>
+              <a:gd name="adj" fmla="val 4762"/>
+            </a:avLst>
+          </a:prstGeom>
+          <a:solidFill>
+            <a:srgbClr val="F3F6F5"/>
+          </a:solidFill>
+          <a:ln w="12700">
+            <a:solidFill>
+              <a:srgbClr val="DEE2E6"/>
+            </a:solidFill>
+            <a:prstDash val="solid"/>
+          </a:ln>
+        </p:spPr>
+      </p:sp>
+      <p:sp>
+        <p:nvSpPr>
+          <p:cNvPr id="9" name="Text 5"/>
           <p:cNvSpPr txBox="1"/>
           <p:nvPr/>
         </p:nvSpPr>
         <p:spPr>
           <a:xfrm>
-            <a:off x="4480560" y="1783080"/>
-            <a:ext cx="4023360" cy="3749040"/>
+            <a:off x="4480560" y="4389120"/>
+            <a:ext cx="7086600" cy="1737360"/>
           </a:xfrm>
           <a:prstGeom prst="rect">
             <a:avLst/>
@@ -2905,304 +3105,74 @@
               <a:buNone/>
             </a:pPr>
             <a:r>
-              <a:rPr lang="en-US" sz="1300" dirty="0">
-                <a:solidFill>
-                  <a:schemeClr val="tx1"/>
+              <a:rPr lang="en-US" sz="1200" dirty="0">
+                <a:solidFill>
+                  <a:srgbClr val="212529"/>
                 </a:solidFill>
                 <a:latin typeface="Consolas" pitchFamily="34" charset="0"/>
                 <a:ea typeface="Consolas" pitchFamily="34" charset="-122"/>
                 <a:cs typeface="Consolas" pitchFamily="34" charset="-120"/>
               </a:rPr>
-              <a:t>conexion.requestMethod = "POST"</a:t>
-            </a:r>
-            <a:endParaRPr lang="en-US" sz="1300" dirty="0"/>
+              <a:t>var peticion = new HttpRequestMessage(HttpMethod.Post, destino) {</a:t>
+            </a:r>
+            <a:endParaRPr lang="en-US" sz="1200" dirty="0"/>
           </a:p>
           <a:p>
             <a:pPr indent="0" marL="0">
               <a:buNone/>
             </a:pPr>
             <a:r>
-              <a:rPr lang="en-US" sz="1300" dirty="0">
-                <a:solidFill>
-                  <a:schemeClr val="tx1"/>
+              <a:rPr lang="en-US" sz="1200" dirty="0">
+                <a:solidFill>
+                  <a:srgbClr val="212529"/>
                 </a:solidFill>
                 <a:latin typeface="Consolas" pitchFamily="34" charset="0"/>
                 <a:ea typeface="Consolas" pitchFamily="34" charset="-122"/>
                 <a:cs typeface="Consolas" pitchFamily="34" charset="-120"/>
               </a:rPr>
-              <a:t>conexion.setRequestProperty(</a:t>
-            </a:r>
-            <a:endParaRPr lang="en-US" sz="1300" dirty="0"/>
+              <a:t>    Content = new StringContent(sobre, Encoding.UTF8, "text/xml") };</a:t>
+            </a:r>
+            <a:endParaRPr lang="en-US" sz="1200" dirty="0"/>
           </a:p>
           <a:p>
             <a:pPr indent="0" marL="0">
               <a:buNone/>
             </a:pPr>
             <a:r>
-              <a:rPr lang="en-US" sz="1300" dirty="0">
-                <a:solidFill>
-                  <a:schemeClr val="tx1"/>
+              <a:rPr lang="en-US" sz="1200" dirty="0">
+                <a:solidFill>
+                  <a:srgbClr val="212529"/>
                 </a:solidFill>
                 <a:latin typeface="Consolas" pitchFamily="34" charset="0"/>
                 <a:ea typeface="Consolas" pitchFamily="34" charset="-122"/>
                 <a:cs typeface="Consolas" pitchFamily="34" charset="-120"/>
               </a:rPr>
-              <a:t>  "Content-Type",</a:t>
-            </a:r>
-            <a:endParaRPr lang="en-US" sz="1300" dirty="0"/>
+              <a:t>peticion.Headers.Add("SOAPAction", $"\"{Namespace}{Contrato}/{operacion}\"");</a:t>
+            </a:r>
+            <a:endParaRPr lang="en-US" sz="1200" dirty="0"/>
           </a:p>
           <a:p>
             <a:pPr indent="0" marL="0">
               <a:buNone/>
             </a:pPr>
-            <a:r>
-              <a:rPr lang="en-US" sz="1300" dirty="0">
-                <a:solidFill>
-                  <a:schemeClr val="tx1"/>
+            <a:endParaRPr lang="en-US" sz="1200" dirty="0"/>
+          </a:p>
+          <a:p>
+            <a:pPr indent="0" marL="0">
+              <a:buNone/>
+            </a:pPr>
+            <a:r>
+              <a:rPr lang="en-US" sz="1200" dirty="0">
+                <a:solidFill>
+                  <a:srgbClr val="212529"/>
                 </a:solidFill>
                 <a:latin typeface="Consolas" pitchFamily="34" charset="0"/>
                 <a:ea typeface="Consolas" pitchFamily="34" charset="-122"/>
                 <a:cs typeface="Consolas" pitchFamily="34" charset="-120"/>
               </a:rPr>
-              <a:t>  "text/xml; charset=utf-8")</a:t>
-            </a:r>
-            <a:endParaRPr lang="en-US" sz="1300" dirty="0"/>
-          </a:p>
-          <a:p>
-            <a:pPr indent="0" marL="0">
-              <a:buNone/>
-            </a:pPr>
-            <a:r>
-              <a:rPr lang="en-US" sz="1300" dirty="0">
-                <a:solidFill>
-                  <a:schemeClr val="tx1"/>
-                </a:solidFill>
-                <a:latin typeface="Consolas" pitchFamily="34" charset="0"/>
-                <a:ea typeface="Consolas" pitchFamily="34" charset="-122"/>
-                <a:cs typeface="Consolas" pitchFamily="34" charset="-120"/>
-              </a:rPr>
-              <a:t>conexion.setRequestProperty(</a:t>
-            </a:r>
-            <a:endParaRPr lang="en-US" sz="1300" dirty="0"/>
-          </a:p>
-          <a:p>
-            <a:pPr indent="0" marL="0">
-              <a:buNone/>
-            </a:pPr>
-            <a:r>
-              <a:rPr lang="en-US" sz="1300" dirty="0">
-                <a:solidFill>
-                  <a:schemeClr val="tx1"/>
-                </a:solidFill>
-                <a:latin typeface="Consolas" pitchFamily="34" charset="0"/>
-                <a:ea typeface="Consolas" pitchFamily="34" charset="-122"/>
-                <a:cs typeface="Consolas" pitchFamily="34" charset="-120"/>
-              </a:rPr>
-              <a:t>  "SOAPAction",</a:t>
-            </a:r>
-            <a:endParaRPr lang="en-US" sz="1300" dirty="0"/>
-          </a:p>
-          <a:p>
-            <a:pPr indent="0" marL="0">
-              <a:buNone/>
-            </a:pPr>
-            <a:r>
-              <a:rPr lang="en-US" sz="1300" dirty="0">
-                <a:solidFill>
-                  <a:schemeClr val="tx1"/>
-                </a:solidFill>
-                <a:latin typeface="Consolas" pitchFamily="34" charset="0"/>
-                <a:ea typeface="Consolas" pitchFamily="34" charset="-122"/>
-                <a:cs typeface="Consolas" pitchFamily="34" charset="-120"/>
-              </a:rPr>
-              <a:t>  "\"$NAMESPACE$CONTRATO/$operacion\"")</a:t>
-            </a:r>
-            <a:endParaRPr lang="en-US" sz="1300" dirty="0"/>
-          </a:p>
-          <a:p>
-            <a:pPr indent="0" marL="0">
-              <a:buNone/>
-            </a:pPr>
-            <a:endParaRPr lang="en-US" sz="1300" dirty="0"/>
-          </a:p>
-          <a:p>
-            <a:pPr indent="0" marL="0">
-              <a:buNone/>
-            </a:pPr>
-            <a:r>
-              <a:rPr lang="en-US" sz="1300" dirty="0">
-                <a:solidFill>
-                  <a:schemeClr val="tx1"/>
-                </a:solidFill>
-                <a:latin typeface="Consolas" pitchFamily="34" charset="0"/>
-                <a:ea typeface="Consolas" pitchFamily="34" charset="-122"/>
-                <a:cs typeface="Consolas" pitchFamily="34" charset="-120"/>
-              </a:rPr>
-              <a:t>when (parser.name) {</a:t>
-            </a:r>
-            <a:endParaRPr lang="en-US" sz="1300" dirty="0"/>
-          </a:p>
-          <a:p>
-            <a:pPr indent="0" marL="0">
-              <a:buNone/>
-            </a:pPr>
-            <a:r>
-              <a:rPr lang="en-US" sz="1300" dirty="0">
-                <a:solidFill>
-                  <a:schemeClr val="tx1"/>
-                </a:solidFill>
-                <a:latin typeface="Consolas" pitchFamily="34" charset="0"/>
-                <a:ea typeface="Consolas" pitchFamily="34" charset="-122"/>
-                <a:cs typeface="Consolas" pitchFamily="34" charset="-120"/>
-              </a:rPr>
-              <a:t>  "${operacion}Result" -&gt;</a:t>
-            </a:r>
-            <a:endParaRPr lang="en-US" sz="1300" dirty="0"/>
-          </a:p>
-          <a:p>
-            <a:pPr indent="0" marL="0">
-              <a:buNone/>
-            </a:pPr>
-            <a:r>
-              <a:rPr lang="en-US" sz="1300" dirty="0">
-                <a:solidFill>
-                  <a:schemeClr val="tx1"/>
-                </a:solidFill>
-                <a:latin typeface="Consolas" pitchFamily="34" charset="0"/>
-                <a:ea typeface="Consolas" pitchFamily="34" charset="-122"/>
-                <a:cs typeface="Consolas" pitchFamily="34" charset="-120"/>
-              </a:rPr>
-              <a:t>      resultado = parser.nextText()</a:t>
-            </a:r>
-            <a:endParaRPr lang="en-US" sz="1300" dirty="0"/>
-          </a:p>
-          <a:p>
-            <a:pPr indent="0" marL="0">
-              <a:buNone/>
-            </a:pPr>
-            <a:r>
-              <a:rPr lang="en-US" sz="1300" dirty="0">
-                <a:solidFill>
-                  <a:schemeClr val="tx1"/>
-                </a:solidFill>
-                <a:latin typeface="Consolas" pitchFamily="34" charset="0"/>
-                <a:ea typeface="Consolas" pitchFamily="34" charset="-122"/>
-                <a:cs typeface="Consolas" pitchFamily="34" charset="-120"/>
-              </a:rPr>
-              <a:t>  "Mensaje" -&gt;</a:t>
-            </a:r>
-            <a:endParaRPr lang="en-US" sz="1300" dirty="0"/>
-          </a:p>
-          <a:p>
-            <a:pPr indent="0" marL="0">
-              <a:buNone/>
-            </a:pPr>
-            <a:r>
-              <a:rPr lang="en-US" sz="1300" dirty="0">
-                <a:solidFill>
-                  <a:schemeClr val="tx1"/>
-                </a:solidFill>
-                <a:latin typeface="Consolas" pitchFamily="34" charset="0"/>
-                <a:ea typeface="Consolas" pitchFamily="34" charset="-122"/>
-                <a:cs typeface="Consolas" pitchFamily="34" charset="-120"/>
-              </a:rPr>
-              <a:t>      mensajeError = parser.nextText()</a:t>
-            </a:r>
-            <a:endParaRPr lang="en-US" sz="1300" dirty="0"/>
-          </a:p>
-          <a:p>
-            <a:pPr indent="0" marL="0">
-              <a:buNone/>
-            </a:pPr>
-            <a:r>
-              <a:rPr lang="en-US" sz="1300" dirty="0">
-                <a:solidFill>
-                  <a:schemeClr val="tx1"/>
-                </a:solidFill>
-                <a:latin typeface="Consolas" pitchFamily="34" charset="0"/>
-                <a:ea typeface="Consolas" pitchFamily="34" charset="-122"/>
-                <a:cs typeface="Consolas" pitchFamily="34" charset="-120"/>
-              </a:rPr>
-              <a:t>}</a:t>
-            </a:r>
-            <a:endParaRPr lang="en-US" sz="1300" dirty="0"/>
-          </a:p>
-        </p:txBody>
-      </p:sp>
-      <p:sp>
-        <p:nvSpPr>
-          <p:cNvPr id="8" name="Espacio captura móvil"/>
-          <p:cNvSpPr/>
-          <p:nvPr/>
-        </p:nvSpPr>
-        <p:spPr>
-          <a:xfrm>
-            <a:off x="8869680" y="1691640"/>
-            <a:ext cx="2788920" cy="4480560"/>
-          </a:xfrm>
-          <a:prstGeom prst="roundRect">
-            <a:avLst>
-              <a:gd name="adj" fmla="val 3279"/>
-            </a:avLst>
-          </a:prstGeom>
-          <a:solidFill>
-            <a:schemeClr val="bg1"/>
-          </a:solidFill>
-          <a:ln w="19050">
-            <a:solidFill>
-              <a:schemeClr val="accent4"/>
-            </a:solidFill>
-            <a:prstDash val="dash"/>
-          </a:ln>
-        </p:spPr>
-      </p:sp>
-      <p:sp>
-        <p:nvSpPr>
-          <p:cNvPr id="9" name="Text 6"/>
-          <p:cNvSpPr txBox="1"/>
-          <p:nvPr/>
-        </p:nvSpPr>
-        <p:spPr>
-          <a:xfrm>
-            <a:off x="8869680" y="1691640"/>
-            <a:ext cx="2788920" cy="4480560"/>
-          </a:xfrm>
-          <a:prstGeom prst="rect">
-            <a:avLst/>
-          </a:prstGeom>
-          <a:noFill/>
-          <a:ln/>
-        </p:spPr>
-        <p:txBody>
-          <a:bodyPr wrap="square" lIns="0" tIns="0" rIns="0" bIns="0" rtlCol="0" anchor="ctr"/>
-          <a:lstStyle/>
-          <a:p>
-            <a:pPr algn="ctr" indent="0" marL="0">
-              <a:buNone/>
-            </a:pPr>
-            <a:r>
-              <a:rPr lang="en-US" sz="1600" dirty="0">
-                <a:solidFill>
-                  <a:schemeClr val="accent4"/>
-                </a:solidFill>
-              </a:rPr>
-              <a:t>Insertar captura</a:t>
-            </a:r>
-            <a:endParaRPr lang="en-US" sz="1600" dirty="0"/>
-          </a:p>
-          <a:p>
-            <a:pPr algn="ctr" indent="0" marL="0">
-              <a:buNone/>
-            </a:pPr>
-            <a:r>
-              <a:rPr lang="en-US" sz="1600" dirty="0">
-                <a:solidFill>
-                  <a:schemeClr val="accent4"/>
-                </a:solidFill>
-              </a:rPr>
-              <a:t>del emulador</a:t>
-            </a:r>
-            <a:endParaRPr lang="en-US" sz="1600" dirty="0"/>
+              <a:t>string? resultado = Buscar(operacion + "Result");   // o el &lt;Mensaje&gt; del Fault</a:t>
+            </a:r>
+            <a:endParaRPr lang="en-US" sz="1200" dirty="0"/>
           </a:p>
         </p:txBody>
       </p:sp>
@@ -3236,7 +3206,7 @@
             <a:lvl1pPr>
               <a:defRPr sz="1000">
                 <a:solidFill>
-                  <a:schemeClr val="accent6"/>
+                  <a:srgbClr val="6C757D"/>
                 </a:solidFill>
               </a:defRPr>
             </a:lvl1pPr>
@@ -3305,49 +3275,80 @@
             <a:r>
               <a:rPr lang="en-US" sz="3400" b="1" dirty="0">
                 <a:solidFill>
-                  <a:schemeClr val="tx2"/>
-                </a:solidFill>
-              </a:rPr>
-              <a:t>Casos de uso</a:t>
+                  <a:srgbClr val="004A38"/>
+                </a:solidFill>
+                <a:latin typeface="Calibri" pitchFamily="34" charset="0"/>
+                <a:ea typeface="Calibri" pitchFamily="34" charset="-122"/>
+                <a:cs typeface="Calibri" pitchFamily="34" charset="-120"/>
+              </a:rPr>
+              <a:t>Despliegue en red por roles</a:t>
             </a:r>
             <a:endParaRPr lang="en-US" sz="3400" dirty="0"/>
           </a:p>
         </p:txBody>
       </p:sp>
-      <p:pic>
-        <p:nvPicPr>
-          <p:cNvPr id="4" name="Diagrama de casos de uso" descr="Diagrama de casos de uso">    </p:cNvPr>
-          <p:cNvPicPr>
-            <a:picLocks noChangeAspect="1"/>
-          </p:cNvPicPr>
-          <p:nvPr/>
-        </p:nvPicPr>
-        <p:blipFill>
-          <a:blip r:embed="rId1"/>
-          <a:stretch>
-            <a:fillRect/>
-          </a:stretch>
-        </p:blipFill>
-        <p:spPr>
-          <a:xfrm>
-            <a:off x="830684" y="1234440"/>
-            <a:ext cx="6933992" cy="4983480"/>
-          </a:xfrm>
-          <a:prstGeom prst="rect">
-            <a:avLst/>
-          </a:prstGeom>
-        </p:spPr>
-      </p:pic>
-      <p:sp>
-        <p:nvSpPr>
-          <p:cNvPr id="5" name="Text 1"/>
+      <p:sp>
+        <p:nvSpPr>
+          <p:cNvPr id="4" name="Rol 1"/>
+          <p:cNvSpPr/>
+          <p:nvPr/>
+        </p:nvSpPr>
+        <p:spPr>
+          <a:xfrm>
+            <a:off x="548640" y="1371600"/>
+            <a:ext cx="3520440" cy="2743200"/>
+          </a:xfrm>
+          <a:prstGeom prst="roundRect">
+            <a:avLst>
+              <a:gd name="adj" fmla="val 4000"/>
+            </a:avLst>
+          </a:prstGeom>
+          <a:solidFill>
+            <a:srgbClr val="F3F6F5"/>
+          </a:solidFill>
+          <a:ln w="12700">
+            <a:solidFill>
+              <a:srgbClr val="DEE2E6"/>
+            </a:solidFill>
+            <a:prstDash val="solid"/>
+          </a:ln>
+        </p:spPr>
+      </p:sp>
+      <p:sp>
+        <p:nvSpPr>
+          <p:cNvPr id="5" name="Insignia 1"/>
+          <p:cNvSpPr/>
+          <p:nvPr/>
+        </p:nvSpPr>
+        <p:spPr>
+          <a:xfrm>
+            <a:off x="777240" y="1600200"/>
+            <a:ext cx="640080" cy="640080"/>
+          </a:xfrm>
+          <a:prstGeom prst="ellipse">
+            <a:avLst/>
+          </a:prstGeom>
+          <a:solidFill>
+            <a:srgbClr val="006950"/>
+          </a:solidFill>
+          <a:ln w="12700">
+            <a:solidFill>
+              <a:srgbClr val="006950"/>
+            </a:solidFill>
+            <a:prstDash val="solid"/>
+          </a:ln>
+        </p:spPr>
+      </p:sp>
+      <p:sp>
+        <p:nvSpPr>
+          <p:cNvPr id="6" name="Text 3"/>
           <p:cNvSpPr txBox="1"/>
           <p:nvPr/>
         </p:nvSpPr>
         <p:spPr>
           <a:xfrm>
-            <a:off x="8321040" y="1463040"/>
-            <a:ext cx="3337560" cy="4114800"/>
+            <a:off x="777240" y="1600200"/>
+            <a:ext cx="640080" cy="640080"/>
           </a:xfrm>
           <a:prstGeom prst="rect">
             <a:avLst/>
@@ -3356,96 +3357,662 @@
           <a:ln/>
         </p:spPr>
         <p:txBody>
+          <a:bodyPr wrap="square" lIns="0" tIns="0" rIns="0" bIns="0" rtlCol="0" anchor="ctr"/>
+          <a:lstStyle/>
+          <a:p>
+            <a:pPr algn="ctr" indent="0" marL="0">
+              <a:buNone/>
+            </a:pPr>
+            <a:r>
+              <a:rPr lang="en-US" sz="2000" b="1" dirty="0">
+                <a:solidFill>
+                  <a:srgbClr val="FFFFFF"/>
+                </a:solidFill>
+                <a:latin typeface="Calibri" pitchFamily="34" charset="0"/>
+                <a:ea typeface="Calibri" pitchFamily="34" charset="-122"/>
+                <a:cs typeface="Calibri" pitchFamily="34" charset="-120"/>
+              </a:rPr>
+              <a:t>1</a:t>
+            </a:r>
+            <a:endParaRPr lang="en-US" sz="2000" dirty="0"/>
+          </a:p>
+        </p:txBody>
+      </p:sp>
+      <p:sp>
+        <p:nvSpPr>
+          <p:cNvPr id="7" name="Text 4"/>
+          <p:cNvSpPr txBox="1"/>
+          <p:nvPr/>
+        </p:nvSpPr>
+        <p:spPr>
+          <a:xfrm>
+            <a:off x="1554480" y="1600200"/>
+            <a:ext cx="2377440" cy="320040"/>
+          </a:xfrm>
+          <a:prstGeom prst="rect">
+            <a:avLst/>
+          </a:prstGeom>
+          <a:noFill/>
+          <a:ln/>
+        </p:spPr>
+        <p:txBody>
+          <a:bodyPr wrap="square" lIns="0" tIns="0" rIns="0" bIns="0" rtlCol="0" anchor="ctr"/>
+          <a:lstStyle/>
+          <a:p>
+            <a:pPr indent="0" marL="0">
+              <a:buNone/>
+            </a:pPr>
+            <a:r>
+              <a:rPr lang="en-US" sz="1400" dirty="0">
+                <a:solidFill>
+                  <a:srgbClr val="6C757D"/>
+                </a:solidFill>
+                <a:latin typeface="Calibri" pitchFamily="34" charset="0"/>
+                <a:ea typeface="Calibri" pitchFamily="34" charset="-122"/>
+                <a:cs typeface="Calibri" pitchFamily="34" charset="-120"/>
+              </a:rPr>
+              <a:t>Integrante 1</a:t>
+            </a:r>
+            <a:endParaRPr lang="en-US" sz="1400" dirty="0"/>
+          </a:p>
+        </p:txBody>
+      </p:sp>
+      <p:sp>
+        <p:nvSpPr>
+          <p:cNvPr id="8" name="Text 5"/>
+          <p:cNvSpPr txBox="1"/>
+          <p:nvPr/>
+        </p:nvSpPr>
+        <p:spPr>
+          <a:xfrm>
+            <a:off x="1554480" y="1920240"/>
+            <a:ext cx="2377440" cy="365760"/>
+          </a:xfrm>
+          <a:prstGeom prst="rect">
+            <a:avLst/>
+          </a:prstGeom>
+          <a:noFill/>
+          <a:ln/>
+        </p:spPr>
+        <p:txBody>
+          <a:bodyPr wrap="square" lIns="0" tIns="0" rIns="0" bIns="0" rtlCol="0" anchor="ctr"/>
+          <a:lstStyle/>
+          <a:p>
+            <a:pPr indent="0" marL="0">
+              <a:buNone/>
+            </a:pPr>
+            <a:r>
+              <a:rPr lang="en-US" sz="1800" b="1" dirty="0">
+                <a:solidFill>
+                  <a:srgbClr val="006950"/>
+                </a:solidFill>
+                <a:latin typeface="Calibri" pitchFamily="34" charset="0"/>
+                <a:ea typeface="Calibri" pitchFamily="34" charset="-122"/>
+                <a:cs typeface="Calibri" pitchFamily="34" charset="-120"/>
+              </a:rPr>
+              <a:t>Servidor + consola</a:t>
+            </a:r>
+            <a:endParaRPr lang="en-US" sz="1800" dirty="0"/>
+          </a:p>
+        </p:txBody>
+      </p:sp>
+      <p:sp>
+        <p:nvSpPr>
+          <p:cNvPr id="9" name="Text 6"/>
+          <p:cNvSpPr txBox="1"/>
+          <p:nvPr/>
+        </p:nvSpPr>
+        <p:spPr>
+          <a:xfrm>
+            <a:off x="777240" y="2560320"/>
+            <a:ext cx="3108960" cy="1371600"/>
+          </a:xfrm>
+          <a:prstGeom prst="rect">
+            <a:avLst/>
+          </a:prstGeom>
+          <a:noFill/>
+          <a:ln/>
+        </p:spPr>
+        <p:txBody>
           <a:bodyPr wrap="square" lIns="0" tIns="0" rIns="0" bIns="0" rtlCol="0" anchor="t"/>
           <a:lstStyle/>
           <a:p>
             <a:pPr indent="0" marL="0">
-              <a:spcAft>
-                <a:spcPts val="1000"/>
-              </a:spcAft>
-              <a:buNone/>
-            </a:pPr>
-            <a:r>
-              <a:rPr lang="en-US" sz="1500" b="1" dirty="0">
-                <a:solidFill>
-                  <a:schemeClr val="tx2"/>
-                </a:solidFill>
-              </a:rPr>
-              <a:t>8 casos de uso</a:t>
+              <a:buNone/>
+            </a:pPr>
+            <a:r>
+              <a:rPr lang="en-US" sz="1500" dirty="0">
+                <a:solidFill>
+                  <a:srgbClr val="212529"/>
+                </a:solidFill>
+                <a:latin typeface="Calibri" pitchFamily="34" charset="0"/>
+                <a:ea typeface="Calibri" pitchFamily="34" charset="-122"/>
+                <a:cs typeface="Calibri" pitchFamily="34" charset="-120"/>
+              </a:rPr>
+              <a:t>Publica WSConversion en IIS con publicar_iis.ps1 (puerto 8085 y firewall)</a:t>
             </a:r>
             <a:endParaRPr lang="en-US" sz="1500" dirty="0"/>
           </a:p>
-          <a:p>
-            <a:pPr marL="342900" indent="-342900">
-              <a:spcAft>
-                <a:spcPts val="1000"/>
-              </a:spcAft>
-              <a:buSzPct val="100000"/>
-              <a:buChar char="•"/>
+        </p:txBody>
+      </p:sp>
+      <p:sp>
+        <p:nvSpPr>
+          <p:cNvPr id="10" name="Rol 2"/>
+          <p:cNvSpPr/>
+          <p:nvPr/>
+        </p:nvSpPr>
+        <p:spPr>
+          <a:xfrm>
+            <a:off x="4297680" y="1371600"/>
+            <a:ext cx="3520440" cy="2743200"/>
+          </a:xfrm>
+          <a:prstGeom prst="roundRect">
+            <a:avLst>
+              <a:gd name="adj" fmla="val 4000"/>
+            </a:avLst>
+          </a:prstGeom>
+          <a:solidFill>
+            <a:srgbClr val="F3F6F5"/>
+          </a:solidFill>
+          <a:ln w="12700">
+            <a:solidFill>
+              <a:srgbClr val="DEE2E6"/>
+            </a:solidFill>
+            <a:prstDash val="solid"/>
+          </a:ln>
+        </p:spPr>
+      </p:sp>
+      <p:sp>
+        <p:nvSpPr>
+          <p:cNvPr id="11" name="Insignia 2"/>
+          <p:cNvSpPr/>
+          <p:nvPr/>
+        </p:nvSpPr>
+        <p:spPr>
+          <a:xfrm>
+            <a:off x="4526280" y="1600200"/>
+            <a:ext cx="640080" cy="640080"/>
+          </a:xfrm>
+          <a:prstGeom prst="ellipse">
+            <a:avLst/>
+          </a:prstGeom>
+          <a:solidFill>
+            <a:srgbClr val="1971C2"/>
+          </a:solidFill>
+          <a:ln w="12700">
+            <a:solidFill>
+              <a:srgbClr val="1971C2"/>
+            </a:solidFill>
+            <a:prstDash val="solid"/>
+          </a:ln>
+        </p:spPr>
+      </p:sp>
+      <p:sp>
+        <p:nvSpPr>
+          <p:cNvPr id="12" name="Text 9"/>
+          <p:cNvSpPr txBox="1"/>
+          <p:nvPr/>
+        </p:nvSpPr>
+        <p:spPr>
+          <a:xfrm>
+            <a:off x="4526280" y="1600200"/>
+            <a:ext cx="640080" cy="640080"/>
+          </a:xfrm>
+          <a:prstGeom prst="rect">
+            <a:avLst/>
+          </a:prstGeom>
+          <a:noFill/>
+          <a:ln/>
+        </p:spPr>
+        <p:txBody>
+          <a:bodyPr wrap="square" lIns="0" tIns="0" rIns="0" bIns="0" rtlCol="0" anchor="ctr"/>
+          <a:lstStyle/>
+          <a:p>
+            <a:pPr algn="ctr" indent="0" marL="0">
+              <a:buNone/>
+            </a:pPr>
+            <a:r>
+              <a:rPr lang="en-US" sz="2000" b="1" dirty="0">
+                <a:solidFill>
+                  <a:srgbClr val="FFFFFF"/>
+                </a:solidFill>
+                <a:latin typeface="Calibri" pitchFamily="34" charset="0"/>
+                <a:ea typeface="Calibri" pitchFamily="34" charset="-122"/>
+                <a:cs typeface="Calibri" pitchFamily="34" charset="-120"/>
+              </a:rPr>
+              <a:t>2</a:t>
+            </a:r>
+            <a:endParaRPr lang="en-US" sz="2000" dirty="0"/>
+          </a:p>
+        </p:txBody>
+      </p:sp>
+      <p:sp>
+        <p:nvSpPr>
+          <p:cNvPr id="13" name="Text 10"/>
+          <p:cNvSpPr txBox="1"/>
+          <p:nvPr/>
+        </p:nvSpPr>
+        <p:spPr>
+          <a:xfrm>
+            <a:off x="5303520" y="1600200"/>
+            <a:ext cx="2377440" cy="320040"/>
+          </a:xfrm>
+          <a:prstGeom prst="rect">
+            <a:avLst/>
+          </a:prstGeom>
+          <a:noFill/>
+          <a:ln/>
+        </p:spPr>
+        <p:txBody>
+          <a:bodyPr wrap="square" lIns="0" tIns="0" rIns="0" bIns="0" rtlCol="0" anchor="ctr"/>
+          <a:lstStyle/>
+          <a:p>
+            <a:pPr indent="0" marL="0">
+              <a:buNone/>
+            </a:pPr>
+            <a:r>
+              <a:rPr lang="en-US" sz="1400" dirty="0">
+                <a:solidFill>
+                  <a:srgbClr val="6C757D"/>
+                </a:solidFill>
+                <a:latin typeface="Calibri" pitchFamily="34" charset="0"/>
+                <a:ea typeface="Calibri" pitchFamily="34" charset="-122"/>
+                <a:cs typeface="Calibri" pitchFamily="34" charset="-120"/>
+              </a:rPr>
+              <a:t>Integrante 2</a:t>
+            </a:r>
+            <a:endParaRPr lang="en-US" sz="1400" dirty="0"/>
+          </a:p>
+        </p:txBody>
+      </p:sp>
+      <p:sp>
+        <p:nvSpPr>
+          <p:cNvPr id="14" name="Text 11"/>
+          <p:cNvSpPr txBox="1"/>
+          <p:nvPr/>
+        </p:nvSpPr>
+        <p:spPr>
+          <a:xfrm>
+            <a:off x="5303520" y="1920240"/>
+            <a:ext cx="2377440" cy="365760"/>
+          </a:xfrm>
+          <a:prstGeom prst="rect">
+            <a:avLst/>
+          </a:prstGeom>
+          <a:noFill/>
+          <a:ln/>
+        </p:spPr>
+        <p:txBody>
+          <a:bodyPr wrap="square" lIns="0" tIns="0" rIns="0" bIns="0" rtlCol="0" anchor="ctr"/>
+          <a:lstStyle/>
+          <a:p>
+            <a:pPr indent="0" marL="0">
+              <a:buNone/>
+            </a:pPr>
+            <a:r>
+              <a:rPr lang="en-US" sz="1800" b="1" dirty="0">
+                <a:solidFill>
+                  <a:srgbClr val="1971C2"/>
+                </a:solidFill>
+                <a:latin typeface="Calibri" pitchFamily="34" charset="0"/>
+                <a:ea typeface="Calibri" pitchFamily="34" charset="-122"/>
+                <a:cs typeface="Calibri" pitchFamily="34" charset="-120"/>
+              </a:rPr>
+              <a:t>Web + escritorio</a:t>
+            </a:r>
+            <a:endParaRPr lang="en-US" sz="1800" dirty="0"/>
+          </a:p>
+        </p:txBody>
+      </p:sp>
+      <p:sp>
+        <p:nvSpPr>
+          <p:cNvPr id="15" name="Text 12"/>
+          <p:cNvSpPr txBox="1"/>
+          <p:nvPr/>
+        </p:nvSpPr>
+        <p:spPr>
+          <a:xfrm>
+            <a:off x="4526280" y="2560320"/>
+            <a:ext cx="3108960" cy="1371600"/>
+          </a:xfrm>
+          <a:prstGeom prst="rect">
+            <a:avLst/>
+          </a:prstGeom>
+          <a:noFill/>
+          <a:ln/>
+        </p:spPr>
+        <p:txBody>
+          <a:bodyPr wrap="square" lIns="0" tIns="0" rIns="0" bIns="0" rtlCol="0" anchor="t"/>
+          <a:lstStyle/>
+          <a:p>
+            <a:pPr indent="0" marL="0">
+              <a:buNone/>
             </a:pPr>
             <a:r>
               <a:rPr lang="en-US" sz="1500" dirty="0">
                 <a:solidFill>
-                  <a:schemeClr val="tx1"/>
-                </a:solidFill>
-              </a:rPr>
-              <a:t>Realizar conversión generaliza temperatura, longitud y masa</a:t>
+                  <a:srgbClr val="212529"/>
+                </a:solidFill>
+                <a:latin typeface="Calibri" pitchFamily="34" charset="0"/>
+                <a:ea typeface="Calibri" pitchFamily="34" charset="-122"/>
+                <a:cs typeface="Calibri" pitchFamily="34" charset="-120"/>
+              </a:rPr>
+              <a:t>Otra PC: App.config y appsettings.json con la IP del servidor</a:t>
             </a:r>
             <a:endParaRPr lang="en-US" sz="1500" dirty="0"/>
           </a:p>
-          <a:p>
-            <a:pPr marL="342900" indent="-342900">
-              <a:spcAft>
-                <a:spcPts val="1000"/>
-              </a:spcAft>
-              <a:buSzPct val="100000"/>
-              <a:buChar char="•"/>
+        </p:txBody>
+      </p:sp>
+      <p:sp>
+        <p:nvSpPr>
+          <p:cNvPr id="16" name="Rol 3"/>
+          <p:cNvSpPr/>
+          <p:nvPr/>
+        </p:nvSpPr>
+        <p:spPr>
+          <a:xfrm>
+            <a:off x="8046720" y="1371600"/>
+            <a:ext cx="3520440" cy="2743200"/>
+          </a:xfrm>
+          <a:prstGeom prst="roundRect">
+            <a:avLst>
+              <a:gd name="adj" fmla="val 4000"/>
+            </a:avLst>
+          </a:prstGeom>
+          <a:solidFill>
+            <a:srgbClr val="F3F6F5"/>
+          </a:solidFill>
+          <a:ln w="12700">
+            <a:solidFill>
+              <a:srgbClr val="DEE2E6"/>
+            </a:solidFill>
+            <a:prstDash val="solid"/>
+          </a:ln>
+        </p:spPr>
+      </p:sp>
+      <p:sp>
+        <p:nvSpPr>
+          <p:cNvPr id="17" name="Insignia 3"/>
+          <p:cNvSpPr/>
+          <p:nvPr/>
+        </p:nvSpPr>
+        <p:spPr>
+          <a:xfrm>
+            <a:off x="8275320" y="1600200"/>
+            <a:ext cx="640080" cy="640080"/>
+          </a:xfrm>
+          <a:prstGeom prst="ellipse">
+            <a:avLst/>
+          </a:prstGeom>
+          <a:solidFill>
+            <a:srgbClr val="7C3AAD"/>
+          </a:solidFill>
+          <a:ln w="12700">
+            <a:solidFill>
+              <a:srgbClr val="7C3AAD"/>
+            </a:solidFill>
+            <a:prstDash val="solid"/>
+          </a:ln>
+        </p:spPr>
+      </p:sp>
+      <p:sp>
+        <p:nvSpPr>
+          <p:cNvPr id="18" name="Text 15"/>
+          <p:cNvSpPr txBox="1"/>
+          <p:nvPr/>
+        </p:nvSpPr>
+        <p:spPr>
+          <a:xfrm>
+            <a:off x="8275320" y="1600200"/>
+            <a:ext cx="640080" cy="640080"/>
+          </a:xfrm>
+          <a:prstGeom prst="rect">
+            <a:avLst/>
+          </a:prstGeom>
+          <a:noFill/>
+          <a:ln/>
+        </p:spPr>
+        <p:txBody>
+          <a:bodyPr wrap="square" lIns="0" tIns="0" rIns="0" bIns="0" rtlCol="0" anchor="ctr"/>
+          <a:lstStyle/>
+          <a:p>
+            <a:pPr algn="ctr" indent="0" marL="0">
+              <a:buNone/>
+            </a:pPr>
+            <a:r>
+              <a:rPr lang="en-US" sz="2000" b="1" dirty="0">
+                <a:solidFill>
+                  <a:srgbClr val="FFFFFF"/>
+                </a:solidFill>
+                <a:latin typeface="Calibri" pitchFamily="34" charset="0"/>
+                <a:ea typeface="Calibri" pitchFamily="34" charset="-122"/>
+                <a:cs typeface="Calibri" pitchFamily="34" charset="-120"/>
+              </a:rPr>
+              <a:t>3</a:t>
+            </a:r>
+            <a:endParaRPr lang="en-US" sz="2000" dirty="0"/>
+          </a:p>
+        </p:txBody>
+      </p:sp>
+      <p:sp>
+        <p:nvSpPr>
+          <p:cNvPr id="19" name="Text 16"/>
+          <p:cNvSpPr txBox="1"/>
+          <p:nvPr/>
+        </p:nvSpPr>
+        <p:spPr>
+          <a:xfrm>
+            <a:off x="9052560" y="1600200"/>
+            <a:ext cx="2377440" cy="320040"/>
+          </a:xfrm>
+          <a:prstGeom prst="rect">
+            <a:avLst/>
+          </a:prstGeom>
+          <a:noFill/>
+          <a:ln/>
+        </p:spPr>
+        <p:txBody>
+          <a:bodyPr wrap="square" lIns="0" tIns="0" rIns="0" bIns="0" rtlCol="0" anchor="ctr"/>
+          <a:lstStyle/>
+          <a:p>
+            <a:pPr indent="0" marL="0">
+              <a:buNone/>
+            </a:pPr>
+            <a:r>
+              <a:rPr lang="en-US" sz="1400" dirty="0">
+                <a:solidFill>
+                  <a:srgbClr val="6C757D"/>
+                </a:solidFill>
+                <a:latin typeface="Calibri" pitchFamily="34" charset="0"/>
+                <a:ea typeface="Calibri" pitchFamily="34" charset="-122"/>
+                <a:cs typeface="Calibri" pitchFamily="34" charset="-120"/>
+              </a:rPr>
+              <a:t>Integrante 3</a:t>
+            </a:r>
+            <a:endParaRPr lang="en-US" sz="1400" dirty="0"/>
+          </a:p>
+        </p:txBody>
+      </p:sp>
+      <p:sp>
+        <p:nvSpPr>
+          <p:cNvPr id="20" name="Text 17"/>
+          <p:cNvSpPr txBox="1"/>
+          <p:nvPr/>
+        </p:nvSpPr>
+        <p:spPr>
+          <a:xfrm>
+            <a:off x="9052560" y="1920240"/>
+            <a:ext cx="2377440" cy="365760"/>
+          </a:xfrm>
+          <a:prstGeom prst="rect">
+            <a:avLst/>
+          </a:prstGeom>
+          <a:noFill/>
+          <a:ln/>
+        </p:spPr>
+        <p:txBody>
+          <a:bodyPr wrap="square" lIns="0" tIns="0" rIns="0" bIns="0" rtlCol="0" anchor="ctr"/>
+          <a:lstStyle/>
+          <a:p>
+            <a:pPr indent="0" marL="0">
+              <a:buNone/>
+            </a:pPr>
+            <a:r>
+              <a:rPr lang="en-US" sz="1800" b="1" dirty="0">
+                <a:solidFill>
+                  <a:srgbClr val="7C3AAD"/>
+                </a:solidFill>
+                <a:latin typeface="Calibri" pitchFamily="34" charset="0"/>
+                <a:ea typeface="Calibri" pitchFamily="34" charset="-122"/>
+                <a:cs typeface="Calibri" pitchFamily="34" charset="-120"/>
+              </a:rPr>
+              <a:t>Móvil</a:t>
+            </a:r>
+            <a:endParaRPr lang="en-US" sz="1800" dirty="0"/>
+          </a:p>
+        </p:txBody>
+      </p:sp>
+      <p:sp>
+        <p:nvSpPr>
+          <p:cNvPr id="21" name="Text 18"/>
+          <p:cNvSpPr txBox="1"/>
+          <p:nvPr/>
+        </p:nvSpPr>
+        <p:spPr>
+          <a:xfrm>
+            <a:off x="8275320" y="2560320"/>
+            <a:ext cx="3108960" cy="1371600"/>
+          </a:xfrm>
+          <a:prstGeom prst="rect">
+            <a:avLst/>
+          </a:prstGeom>
+          <a:noFill/>
+          <a:ln/>
+        </p:spPr>
+        <p:txBody>
+          <a:bodyPr wrap="square" lIns="0" tIns="0" rIns="0" bIns="0" rtlCol="0" anchor="t"/>
+          <a:lstStyle/>
+          <a:p>
+            <a:pPr indent="0" marL="0">
+              <a:buNone/>
             </a:pPr>
             <a:r>
               <a:rPr lang="en-US" sz="1500" dirty="0">
                 <a:solidFill>
-                  <a:schemeClr val="tx1"/>
-                </a:solidFill>
-              </a:rPr>
-              <a:t>Incluye la validación del valor</a:t>
+                  <a:srgbClr val="212529"/>
+                </a:solidFill>
+                <a:latin typeface="Calibri" pitchFamily="34" charset="0"/>
+                <a:ea typeface="Calibri" pitchFamily="34" charset="-122"/>
+                <a:cs typeface="Calibri" pitchFamily="34" charset="-120"/>
+              </a:rPr>
+              <a:t>Celular real por WiFi: URL del servidor en el login de la app</a:t>
             </a:r>
             <a:endParaRPr lang="en-US" sz="1500" dirty="0"/>
           </a:p>
-          <a:p>
-            <a:pPr marL="342900" indent="-342900">
-              <a:spcAft>
-                <a:spcPts val="1000"/>
-              </a:spcAft>
-              <a:buSzPct val="100000"/>
-              <a:buChar char="•"/>
-            </a:pPr>
-            <a:r>
-              <a:rPr lang="en-US" sz="1500" dirty="0">
-                <a:solidFill>
-                  <a:schemeClr val="tx1"/>
-                </a:solidFill>
-              </a:rPr>
-              <a:t>Intercambiar unidades la extiende</a:t>
-            </a:r>
-            <a:endParaRPr lang="en-US" sz="1500" dirty="0"/>
-          </a:p>
-          <a:p>
-            <a:pPr marL="342900" indent="-342900">
-              <a:spcAft>
-                <a:spcPts val="1000"/>
-              </a:spcAft>
-              <a:buSzPct val="100000"/>
-              <a:buChar char="•"/>
-            </a:pPr>
-            <a:r>
-              <a:rPr lang="en-US" sz="1500" dirty="0">
-                <a:solidFill>
-                  <a:schemeClr val="tx1"/>
-                </a:solidFill>
-              </a:rPr>
-              <a:t>El Servicio SOAP es un actor secundario</a:t>
-            </a:r>
-            <a:endParaRPr lang="en-US" sz="1500" dirty="0"/>
+        </p:txBody>
+      </p:sp>
+      <p:sp>
+        <p:nvSpPr>
+          <p:cNvPr id="22" name="Caja URL"/>
+          <p:cNvSpPr/>
+          <p:nvPr/>
+        </p:nvSpPr>
+        <p:spPr>
+          <a:xfrm>
+            <a:off x="548640" y="4434840"/>
+            <a:ext cx="11109960" cy="1051560"/>
+          </a:xfrm>
+          <a:prstGeom prst="roundRect">
+            <a:avLst>
+              <a:gd name="adj" fmla="val 8696"/>
+            </a:avLst>
+          </a:prstGeom>
+          <a:solidFill>
+            <a:srgbClr val="F3F6F5"/>
+          </a:solidFill>
+          <a:ln w="12700">
+            <a:solidFill>
+              <a:srgbClr val="DEE2E6"/>
+            </a:solidFill>
+            <a:prstDash val="solid"/>
+          </a:ln>
+        </p:spPr>
+      </p:sp>
+      <p:sp>
+        <p:nvSpPr>
+          <p:cNvPr id="23" name="Text 20"/>
+          <p:cNvSpPr txBox="1"/>
+          <p:nvPr/>
+        </p:nvSpPr>
+        <p:spPr>
+          <a:xfrm>
+            <a:off x="548640" y="4434840"/>
+            <a:ext cx="11109960" cy="1051560"/>
+          </a:xfrm>
+          <a:prstGeom prst="rect">
+            <a:avLst/>
+          </a:prstGeom>
+          <a:noFill/>
+          <a:ln/>
+        </p:spPr>
+        <p:txBody>
+          <a:bodyPr wrap="square" lIns="1905" tIns="1905" rIns="1905" bIns="1905" rtlCol="0" anchor="ctr"/>
+          <a:lstStyle/>
+          <a:p>
+            <a:pPr algn="ctr" indent="0" marL="0">
+              <a:buNone/>
+            </a:pPr>
+            <a:r>
+              <a:rPr lang="en-US" sz="2400" b="1" dirty="0">
+                <a:solidFill>
+                  <a:srgbClr val="004A38"/>
+                </a:solidFill>
+                <a:latin typeface="Consolas" pitchFamily="34" charset="0"/>
+                <a:ea typeface="Consolas" pitchFamily="34" charset="-122"/>
+                <a:cs typeface="Consolas" pitchFamily="34" charset="-120"/>
+              </a:rPr>
+              <a:t>http://IP-DEL-SERVIDOR:8085/WSConversion.svc</a:t>
+            </a:r>
+            <a:endParaRPr lang="en-US" sz="2400" dirty="0"/>
+          </a:p>
+        </p:txBody>
+      </p:sp>
+      <p:sp>
+        <p:nvSpPr>
+          <p:cNvPr id="24" name="Text 21"/>
+          <p:cNvSpPr txBox="1"/>
+          <p:nvPr/>
+        </p:nvSpPr>
+        <p:spPr>
+          <a:xfrm>
+            <a:off x="548640" y="5669280"/>
+            <a:ext cx="11109960" cy="457200"/>
+          </a:xfrm>
+          <a:prstGeom prst="rect">
+            <a:avLst/>
+          </a:prstGeom>
+          <a:noFill/>
+          <a:ln/>
+        </p:spPr>
+        <p:txBody>
+          <a:bodyPr wrap="square" lIns="0" tIns="0" rIns="0" bIns="0" rtlCol="0" anchor="ctr"/>
+          <a:lstStyle/>
+          <a:p>
+            <a:pPr indent="0" marL="0">
+              <a:buNone/>
+            </a:pPr>
+            <a:r>
+              <a:rPr lang="en-US" sz="1400" i="1" dirty="0">
+                <a:solidFill>
+                  <a:srgbClr val="6C757D"/>
+                </a:solidFill>
+                <a:latin typeface="Calibri" pitchFamily="34" charset="0"/>
+                <a:ea typeface="Calibri" pitchFamily="34" charset="-122"/>
+                <a:cs typeface="Calibri" pitchFamily="34" charset="-120"/>
+              </a:rPr>
+              <a:t>IIS Express solo responde a localhost (400 si se usa la IP): por eso el servidor se publica en IIS. Todos en la misma red WiFi.</a:t>
+            </a:r>
+            <a:endParaRPr lang="en-US" sz="1400" dirty="0"/>
           </a:p>
         </p:txBody>
       </p:sp>
@@ -3479,7 +4046,7 @@
             <a:lvl1pPr>
               <a:defRPr sz="1000">
                 <a:solidFill>
-                  <a:schemeClr val="accent6"/>
+                  <a:srgbClr val="6C757D"/>
                 </a:solidFill>
               </a:defRPr>
             </a:lvl1pPr>
@@ -3548,8 +4115,272 @@
             <a:r>
               <a:rPr lang="en-US" sz="3400" b="1" dirty="0">
                 <a:solidFill>
-                  <a:schemeClr val="tx2"/>
-                </a:solidFill>
+                  <a:srgbClr val="004A38"/>
+                </a:solidFill>
+                <a:latin typeface="Calibri" pitchFamily="34" charset="0"/>
+                <a:ea typeface="Calibri" pitchFamily="34" charset="-122"/>
+                <a:cs typeface="Calibri" pitchFamily="34" charset="-120"/>
+              </a:rPr>
+              <a:t>Casos de uso</a:t>
+            </a:r>
+            <a:endParaRPr lang="en-US" sz="3400" dirty="0"/>
+          </a:p>
+        </p:txBody>
+      </p:sp>
+      <p:pic>
+        <p:nvPicPr>
+          <p:cNvPr id="4" name="Diagrama de casos de uso" descr="Diagrama de casos de uso">    </p:cNvPr>
+          <p:cNvPicPr>
+            <a:picLocks noChangeAspect="1"/>
+          </p:cNvPicPr>
+          <p:nvPr/>
+        </p:nvPicPr>
+        <p:blipFill>
+          <a:blip r:embed="rId1"/>
+          <a:stretch>
+            <a:fillRect/>
+          </a:stretch>
+        </p:blipFill>
+        <p:spPr>
+          <a:xfrm>
+            <a:off x="830684" y="1234440"/>
+            <a:ext cx="6933992" cy="4983480"/>
+          </a:xfrm>
+          <a:prstGeom prst="rect">
+            <a:avLst/>
+          </a:prstGeom>
+        </p:spPr>
+      </p:pic>
+      <p:sp>
+        <p:nvSpPr>
+          <p:cNvPr id="5" name="Text 1"/>
+          <p:cNvSpPr txBox="1"/>
+          <p:nvPr/>
+        </p:nvSpPr>
+        <p:spPr>
+          <a:xfrm>
+            <a:off x="8321040" y="1463040"/>
+            <a:ext cx="3337560" cy="4114800"/>
+          </a:xfrm>
+          <a:prstGeom prst="rect">
+            <a:avLst/>
+          </a:prstGeom>
+          <a:noFill/>
+          <a:ln/>
+        </p:spPr>
+        <p:txBody>
+          <a:bodyPr wrap="square" lIns="0" tIns="0" rIns="0" bIns="0" rtlCol="0" anchor="t"/>
+          <a:lstStyle/>
+          <a:p>
+            <a:pPr indent="0" marL="0">
+              <a:spcAft>
+                <a:spcPts val="1000"/>
+              </a:spcAft>
+              <a:buNone/>
+            </a:pPr>
+            <a:r>
+              <a:rPr lang="en-US" sz="1500" b="1" dirty="0">
+                <a:solidFill>
+                  <a:srgbClr val="004A38"/>
+                </a:solidFill>
+                <a:latin typeface="Calibri" pitchFamily="34" charset="0"/>
+                <a:ea typeface="Calibri" pitchFamily="34" charset="-122"/>
+                <a:cs typeface="Calibri" pitchFamily="34" charset="-120"/>
+              </a:rPr>
+              <a:t>8 casos de uso</a:t>
+            </a:r>
+            <a:endParaRPr lang="en-US" sz="1500" dirty="0"/>
+          </a:p>
+          <a:p>
+            <a:pPr marL="342900" indent="-342900">
+              <a:spcAft>
+                <a:spcPts val="1000"/>
+              </a:spcAft>
+              <a:buSzPct val="100000"/>
+              <a:buChar char="•"/>
+            </a:pPr>
+            <a:r>
+              <a:rPr lang="en-US" sz="1500" dirty="0">
+                <a:solidFill>
+                  <a:srgbClr val="212529"/>
+                </a:solidFill>
+                <a:latin typeface="Calibri" pitchFamily="34" charset="0"/>
+                <a:ea typeface="Calibri" pitchFamily="34" charset="-122"/>
+                <a:cs typeface="Calibri" pitchFamily="34" charset="-120"/>
+              </a:rPr>
+              <a:t>Realizar conversión generaliza temperatura, longitud y masa</a:t>
+            </a:r>
+            <a:endParaRPr lang="en-US" sz="1500" dirty="0"/>
+          </a:p>
+          <a:p>
+            <a:pPr marL="342900" indent="-342900">
+              <a:spcAft>
+                <a:spcPts val="1000"/>
+              </a:spcAft>
+              <a:buSzPct val="100000"/>
+              <a:buChar char="•"/>
+            </a:pPr>
+            <a:r>
+              <a:rPr lang="en-US" sz="1500" dirty="0">
+                <a:solidFill>
+                  <a:srgbClr val="212529"/>
+                </a:solidFill>
+                <a:latin typeface="Calibri" pitchFamily="34" charset="0"/>
+                <a:ea typeface="Calibri" pitchFamily="34" charset="-122"/>
+                <a:cs typeface="Calibri" pitchFamily="34" charset="-120"/>
+              </a:rPr>
+              <a:t>Incluye la validación del valor</a:t>
+            </a:r>
+            <a:endParaRPr lang="en-US" sz="1500" dirty="0"/>
+          </a:p>
+          <a:p>
+            <a:pPr marL="342900" indent="-342900">
+              <a:spcAft>
+                <a:spcPts val="1000"/>
+              </a:spcAft>
+              <a:buSzPct val="100000"/>
+              <a:buChar char="•"/>
+            </a:pPr>
+            <a:r>
+              <a:rPr lang="en-US" sz="1500" dirty="0">
+                <a:solidFill>
+                  <a:srgbClr val="212529"/>
+                </a:solidFill>
+                <a:latin typeface="Calibri" pitchFamily="34" charset="0"/>
+                <a:ea typeface="Calibri" pitchFamily="34" charset="-122"/>
+                <a:cs typeface="Calibri" pitchFamily="34" charset="-120"/>
+              </a:rPr>
+              <a:t>Intercambiar unidades la extiende</a:t>
+            </a:r>
+            <a:endParaRPr lang="en-US" sz="1500" dirty="0"/>
+          </a:p>
+          <a:p>
+            <a:pPr marL="342900" indent="-342900">
+              <a:spcAft>
+                <a:spcPts val="1000"/>
+              </a:spcAft>
+              <a:buSzPct val="100000"/>
+              <a:buChar char="•"/>
+            </a:pPr>
+            <a:r>
+              <a:rPr lang="en-US" sz="1500" dirty="0">
+                <a:solidFill>
+                  <a:srgbClr val="212529"/>
+                </a:solidFill>
+                <a:latin typeface="Calibri" pitchFamily="34" charset="0"/>
+                <a:ea typeface="Calibri" pitchFamily="34" charset="-122"/>
+                <a:cs typeface="Calibri" pitchFamily="34" charset="-120"/>
+              </a:rPr>
+              <a:t>El Servicio SOAP es un actor secundario</a:t>
+            </a:r>
+            <a:endParaRPr lang="en-US" sz="1500" dirty="0"/>
+          </a:p>
+        </p:txBody>
+      </p:sp>
+      <p:sp>
+        <p:nvSpPr>
+          <p:cNvPr id="25" name="Slide Number Placeholder 0"/>
+          <p:cNvSpPr>
+            <a:spLocks noGrp="1"/>
+          </p:cNvSpPr>
+          <p:nvPr>
+            <p:ph type="sldNum" sz="quarter" idx="4294967295"/>
+          </p:nvPr>
+        </p:nvSpPr>
+        <p:spPr>
+          <a:xfrm>
+            <a:off x="11155680" y="6400800"/>
+            <a:ext cx="457200" cy="274320"/>
+          </a:xfrm>
+          <a:prstGeom prst="rect">
+            <a:avLst/>
+          </a:prstGeom>
+          <a:extLst>
+            <a:ext uri="{C572A759-6A51-4108-AA02-DFA0A04FC94B}">
+              <ma14:wrappingTextBoxFlag xmlns:ma14="http://schemas.microsoft.com/office/mac/drawingml/2011/main" val="0"/>
+            </a:ext>
+          </a:extLst>
+        </p:spPr>
+        <p:txBody>
+          <a:bodyPr/>
+          <a:lstStyle>
+            <a:lvl1pPr>
+              <a:defRPr sz="1000">
+                <a:solidFill>
+                  <a:srgbClr val="6C757D"/>
+                </a:solidFill>
+              </a:defRPr>
+            </a:lvl1pPr>
+          </a:lstStyle>
+          <a:p>
+            <a:pPr algn="r"/>
+            <a:fld id="{F7021451-1387-4CA6-816F-3879F97B5CBC}" type="slidenum">
+              <a:rPr b="0" lang="en-US"/>
+              <a:t>12</a:t>
+            </a:fld>
+            <a:endParaRPr lang="en-US"/>
+          </a:p>
+        </p:txBody>
+      </p:sp>
+    </p:spTree>
+  </p:cSld>
+  <p:clrMapOvr>
+    <a:masterClrMapping/>
+  </p:clrMapOvr>
+</p:sld>
+</file>
+
+<file path=ppt/slides/slide13.xml><?xml version="1.0" encoding="utf-8"?>
+<p:sld xmlns:a="http://schemas.openxmlformats.org/drawingml/2006/main" xmlns:r="http://schemas.openxmlformats.org/officeDocument/2006/relationships" xmlns:p="http://schemas.openxmlformats.org/presentationml/2006/main">
+  <p:cSld name="Slide 13">
+    <p:spTree>
+      <p:nvGrpSpPr>
+        <p:cNvPr id="1" name=""/>
+        <p:cNvGrpSpPr/>
+        <p:nvPr/>
+      </p:nvGrpSpPr>
+      <p:grpSpPr>
+        <a:xfrm>
+          <a:off x="0" y="0"/>
+          <a:ext cx="0" cy="0"/>
+          <a:chOff x="0" y="0"/>
+          <a:chExt cx="0" cy="0"/>
+        </a:xfrm>
+      </p:grpSpPr>
+      <p:sp>
+        <p:nvSpPr>
+          <p:cNvPr id="2" name="Text 0"/>
+          <p:cNvSpPr/>
+          <p:nvPr>
+            <p:ph idx="100" type="title" hasCustomPrompt="1"/>
+          </p:nvPr>
+        </p:nvSpPr>
+        <p:spPr>
+          <a:xfrm>
+            <a:off x="548640" y="320040"/>
+            <a:ext cx="11064240" cy="777240"/>
+          </a:xfrm>
+          <a:prstGeom prst="rect">
+            <a:avLst/>
+          </a:prstGeom>
+          <a:noFill/>
+          <a:ln/>
+        </p:spPr>
+        <p:txBody>
+          <a:bodyPr wrap="square" lIns="0" tIns="0" rIns="0" bIns="0" rtlCol="0" anchor="ctr"/>
+          <a:lstStyle/>
+          <a:p>
+            <a:pPr algn="l" indent="0" marL="0">
+              <a:buNone/>
+            </a:pPr>
+            <a:r>
+              <a:rPr lang="en-US" sz="3400" b="1" dirty="0">
+                <a:solidFill>
+                  <a:srgbClr val="004A38"/>
+                </a:solidFill>
+                <a:latin typeface="Calibri" pitchFamily="34" charset="0"/>
+                <a:ea typeface="Calibri" pitchFamily="34" charset="-122"/>
+                <a:cs typeface="Calibri" pitchFamily="34" charset="-120"/>
               </a:rPr>
               <a:t>Pruebas realizadas</a:t>
             </a:r>
@@ -3574,7 +4405,7 @@
             </a:avLst>
           </a:prstGeom>
           <a:solidFill>
-            <a:schemeClr val="bg2"/>
+            <a:srgbClr val="F3F6F5"/>
           </a:solidFill>
           <a:ln w="12700">
             <a:solidFill>
@@ -3611,8 +4442,11 @@
             <a:r>
               <a:rPr lang="en-US" sz="6400" b="1" dirty="0">
                 <a:solidFill>
-                  <a:schemeClr val="accent1"/>
-                </a:solidFill>
+                  <a:srgbClr val="006950"/>
+                </a:solidFill>
+                <a:latin typeface="Calibri" pitchFamily="34" charset="0"/>
+                <a:ea typeface="Calibri" pitchFamily="34" charset="-122"/>
+                <a:cs typeface="Calibri" pitchFamily="34" charset="-120"/>
               </a:rPr>
               <a:t>15/15</a:t>
             </a:r>
@@ -3647,8 +4481,11 @@
             <a:r>
               <a:rPr lang="en-US" sz="1600" dirty="0">
                 <a:solidFill>
-                  <a:schemeClr val="tx1"/>
-                </a:solidFill>
+                  <a:srgbClr val="212529"/>
+                </a:solidFill>
+                <a:latin typeface="Calibri" pitchFamily="34" charset="0"/>
+                <a:ea typeface="Calibri" pitchFamily="34" charset="-122"/>
+                <a:cs typeface="Calibri" pitchFamily="34" charset="-120"/>
               </a:rPr>
               <a:t>casos de prueba superados</a:t>
             </a:r>
@@ -3683,8 +4520,11 @@
             <a:r>
               <a:rPr lang="en-US" sz="4400" b="1" dirty="0">
                 <a:solidFill>
-                  <a:schemeClr val="accent3"/>
-                </a:solidFill>
+                  <a:srgbClr val="1971C2"/>
+                </a:solidFill>
+                <a:latin typeface="Calibri" pitchFamily="34" charset="0"/>
+                <a:ea typeface="Calibri" pitchFamily="34" charset="-122"/>
+                <a:cs typeface="Calibri" pitchFamily="34" charset="-120"/>
               </a:rPr>
               <a:t>16/16</a:t>
             </a:r>
@@ -3719,8 +4559,11 @@
             <a:r>
               <a:rPr lang="en-US" sz="1600" dirty="0">
                 <a:solidFill>
-                  <a:schemeClr val="tx1"/>
-                </a:solidFill>
+                  <a:srgbClr val="212529"/>
+                </a:solidFill>
+                <a:latin typeface="Calibri" pitchFamily="34" charset="0"/>
+                <a:ea typeface="Calibri" pitchFamily="34" charset="-122"/>
+                <a:cs typeface="Calibri" pitchFamily="34" charset="-120"/>
               </a:rPr>
               <a:t>conversiones exactas</a:t>
             </a:r>
@@ -3730,7 +4573,7 @@
       </p:sp>
       <p:graphicFrame>
         <p:nvGraphicFramePr>
-          <p:cNvPr id="13" name="Table 0"/>
+          <p:cNvPr id="14" name="Table 0"/>
           <p:cNvGraphicFramePr>
             <a:graphicFrameLocks noGrp="1"/>
           </p:cNvGraphicFramePr>
@@ -3767,7 +4610,7 @@
                       <a:r>
                         <a:rPr lang="en-US" sz="1300" b="1" dirty="0">
                           <a:solidFill>
-                            <a:schemeClr val="bg1"/>
+                            <a:srgbClr val="FFFFFF"/>
                           </a:solidFill>
                         </a:rPr>
                         <a:t>Caso</a:t>
@@ -3813,7 +4656,7 @@
                       <a:tailEnd type="none" w="med" len="med"/>
                     </a:lnB>
                     <a:solidFill>
-                      <a:schemeClr val="accent1"/>
+                      <a:srgbClr val="006950"/>
                     </a:solidFill>
                   </a:tcPr>
                 </a:tc>
@@ -3828,7 +4671,7 @@
                       <a:r>
                         <a:rPr lang="en-US" sz="1300" b="1" dirty="0">
                           <a:solidFill>
-                            <a:schemeClr val="bg1"/>
+                            <a:srgbClr val="FFFFFF"/>
                           </a:solidFill>
                         </a:rPr>
                         <a:t>Entrada</a:t>
@@ -3874,7 +4717,7 @@
                       <a:tailEnd type="none" w="med" len="med"/>
                     </a:lnB>
                     <a:solidFill>
-                      <a:schemeClr val="accent1"/>
+                      <a:srgbClr val="006950"/>
                     </a:solidFill>
                   </a:tcPr>
                 </a:tc>
@@ -3889,7 +4732,7 @@
                       <a:r>
                         <a:rPr lang="en-US" sz="1300" b="1" dirty="0">
                           <a:solidFill>
-                            <a:schemeClr val="bg1"/>
+                            <a:srgbClr val="FFFFFF"/>
                           </a:solidFill>
                         </a:rPr>
                         <a:t>Resultado</a:t>
@@ -3935,7 +4778,7 @@
                       <a:tailEnd type="none" w="med" len="med"/>
                     </a:lnB>
                     <a:solidFill>
-                      <a:schemeClr val="accent1"/>
+                      <a:srgbClr val="006950"/>
                     </a:solidFill>
                   </a:tcPr>
                 </a:tc>
@@ -3952,7 +4795,7 @@
                       <a:r>
                         <a:rPr lang="en-US" sz="1300" dirty="0">
                           <a:solidFill>
-                            <a:schemeClr val="tx1"/>
+                            <a:srgbClr val="212529"/>
                           </a:solidFill>
                         </a:rPr>
                         <a:t>Login correcto / incorrecto</a:t>
@@ -3998,7 +4841,7 @@
                       <a:tailEnd type="none" w="med" len="med"/>
                     </a:lnB>
                     <a:solidFill>
-                      <a:schemeClr val="bg1"/>
+                      <a:srgbClr val="FFFFFF"/>
                     </a:solidFill>
                   </a:tcPr>
                 </a:tc>
@@ -4013,10 +4856,10 @@
                       <a:r>
                         <a:rPr lang="en-US" sz="1300" dirty="0">
                           <a:solidFill>
-                            <a:schemeClr val="tx1"/>
+                            <a:srgbClr val="212529"/>
                           </a:solidFill>
                         </a:rPr>
-                        <a:t>espe / clave</a:t>
+                        <a:t>monster / monster69</a:t>
                       </a:r>
                       <a:endParaRPr lang="en-US" sz="1300" dirty="0"/>
                     </a:p>
@@ -4059,7 +4902,7 @@
                       <a:tailEnd type="none" w="med" len="med"/>
                     </a:lnB>
                     <a:solidFill>
-                      <a:schemeClr val="bg1"/>
+                      <a:srgbClr val="FFFFFF"/>
                     </a:solidFill>
                   </a:tcPr>
                 </a:tc>
@@ -4074,10 +4917,10 @@
                       <a:r>
                         <a:rPr lang="en-US" sz="1300" dirty="0">
                           <a:solidFill>
-                            <a:schemeClr val="tx1"/>
+                            <a:srgbClr val="212529"/>
                           </a:solidFill>
                         </a:rPr>
-                        <a:t>Acceso · «Intentos restantes: 2»</a:t>
+                        <a:t>Acceso · «Intentos restantes: 2» (servidor)</a:t>
                       </a:r>
                       <a:endParaRPr lang="en-US" sz="1300" dirty="0"/>
                     </a:p>
@@ -4120,7 +4963,7 @@
                       <a:tailEnd type="none" w="med" len="med"/>
                     </a:lnB>
                     <a:solidFill>
-                      <a:schemeClr val="bg1"/>
+                      <a:srgbClr val="FFFFFF"/>
                     </a:solidFill>
                   </a:tcPr>
                 </a:tc>
@@ -4137,7 +4980,7 @@
                       <a:r>
                         <a:rPr lang="en-US" sz="1300" dirty="0">
                           <a:solidFill>
-                            <a:schemeClr val="tx1"/>
+                            <a:srgbClr val="212529"/>
                           </a:solidFill>
                         </a:rPr>
                         <a:t>Celsius → Fahrenheit</a:t>
@@ -4183,7 +5026,7 @@
                       <a:tailEnd type="none" w="med" len="med"/>
                     </a:lnB>
                     <a:solidFill>
-                      <a:schemeClr val="bg1"/>
+                      <a:srgbClr val="FFFFFF"/>
                     </a:solidFill>
                   </a:tcPr>
                 </a:tc>
@@ -4198,7 +5041,7 @@
                       <a:r>
                         <a:rPr lang="en-US" sz="1300" dirty="0">
                           <a:solidFill>
-                            <a:schemeClr val="tx1"/>
+                            <a:srgbClr val="212529"/>
                           </a:solidFill>
                         </a:rPr>
                         <a:t>100</a:t>
@@ -4244,7 +5087,7 @@
                       <a:tailEnd type="none" w="med" len="med"/>
                     </a:lnB>
                     <a:solidFill>
-                      <a:schemeClr val="bg1"/>
+                      <a:srgbClr val="FFFFFF"/>
                     </a:solidFill>
                   </a:tcPr>
                 </a:tc>
@@ -4259,7 +5102,7 @@
                       <a:r>
                         <a:rPr lang="en-US" sz="1300" dirty="0">
                           <a:solidFill>
-                            <a:schemeClr val="tx1"/>
+                            <a:srgbClr val="212529"/>
                           </a:solidFill>
                         </a:rPr>
                         <a:t>212</a:t>
@@ -4305,7 +5148,7 @@
                       <a:tailEnd type="none" w="med" len="med"/>
                     </a:lnB>
                     <a:solidFill>
-                      <a:schemeClr val="bg1"/>
+                      <a:srgbClr val="FFFFFF"/>
                     </a:solidFill>
                   </a:tcPr>
                 </a:tc>
@@ -4322,7 +5165,7 @@
                       <a:r>
                         <a:rPr lang="en-US" sz="1300" dirty="0">
                           <a:solidFill>
-                            <a:schemeClr val="tx1"/>
+                            <a:srgbClr val="212529"/>
                           </a:solidFill>
                         </a:rPr>
                         <a:t>Millas → Kilómetros</a:t>
@@ -4368,7 +5211,7 @@
                       <a:tailEnd type="none" w="med" len="med"/>
                     </a:lnB>
                     <a:solidFill>
-                      <a:schemeClr val="bg1"/>
+                      <a:srgbClr val="FFFFFF"/>
                     </a:solidFill>
                   </a:tcPr>
                 </a:tc>
@@ -4383,7 +5226,7 @@
                       <a:r>
                         <a:rPr lang="en-US" sz="1300" dirty="0">
                           <a:solidFill>
-                            <a:schemeClr val="tx1"/>
+                            <a:srgbClr val="212529"/>
                           </a:solidFill>
                         </a:rPr>
                         <a:t>1</a:t>
@@ -4429,7 +5272,7 @@
                       <a:tailEnd type="none" w="med" len="med"/>
                     </a:lnB>
                     <a:solidFill>
-                      <a:schemeClr val="bg1"/>
+                      <a:srgbClr val="FFFFFF"/>
                     </a:solidFill>
                   </a:tcPr>
                 </a:tc>
@@ -4444,7 +5287,7 @@
                       <a:r>
                         <a:rPr lang="en-US" sz="1300" dirty="0">
                           <a:solidFill>
-                            <a:schemeClr val="tx1"/>
+                            <a:srgbClr val="212529"/>
                           </a:solidFill>
                         </a:rPr>
                         <a:t>1.609344</a:t>
@@ -4490,7 +5333,7 @@
                       <a:tailEnd type="none" w="med" len="med"/>
                     </a:lnB>
                     <a:solidFill>
-                      <a:schemeClr val="bg1"/>
+                      <a:srgbClr val="FFFFFF"/>
                     </a:solidFill>
                   </a:tcPr>
                 </a:tc>
@@ -4507,7 +5350,7 @@
                       <a:r>
                         <a:rPr lang="en-US" sz="1300" dirty="0">
                           <a:solidFill>
-                            <a:schemeClr val="tx1"/>
+                            <a:srgbClr val="212529"/>
                           </a:solidFill>
                         </a:rPr>
                         <a:t>Kilogramos → Libras</a:t>
@@ -4553,7 +5396,7 @@
                       <a:tailEnd type="none" w="med" len="med"/>
                     </a:lnB>
                     <a:solidFill>
-                      <a:schemeClr val="bg1"/>
+                      <a:srgbClr val="FFFFFF"/>
                     </a:solidFill>
                   </a:tcPr>
                 </a:tc>
@@ -4568,7 +5411,7 @@
                       <a:r>
                         <a:rPr lang="en-US" sz="1300" dirty="0">
                           <a:solidFill>
-                            <a:schemeClr val="tx1"/>
+                            <a:srgbClr val="212529"/>
                           </a:solidFill>
                         </a:rPr>
                         <a:t>1</a:t>
@@ -4614,7 +5457,7 @@
                       <a:tailEnd type="none" w="med" len="med"/>
                     </a:lnB>
                     <a:solidFill>
-                      <a:schemeClr val="bg1"/>
+                      <a:srgbClr val="FFFFFF"/>
                     </a:solidFill>
                   </a:tcPr>
                 </a:tc>
@@ -4629,7 +5472,7 @@
                       <a:r>
                         <a:rPr lang="en-US" sz="1300" dirty="0">
                           <a:solidFill>
-                            <a:schemeClr val="tx1"/>
+                            <a:srgbClr val="212529"/>
                           </a:solidFill>
                         </a:rPr>
                         <a:t>2.204622622</a:t>
@@ -4675,7 +5518,7 @@
                       <a:tailEnd type="none" w="med" len="med"/>
                     </a:lnB>
                     <a:solidFill>
-                      <a:schemeClr val="bg1"/>
+                      <a:srgbClr val="FFFFFF"/>
                     </a:solidFill>
                   </a:tcPr>
                 </a:tc>
@@ -4692,7 +5535,7 @@
                       <a:r>
                         <a:rPr lang="en-US" sz="1300" dirty="0">
                           <a:solidFill>
-                            <a:schemeClr val="tx1"/>
+                            <a:srgbClr val="212529"/>
                           </a:solidFill>
                         </a:rPr>
                         <a:t>Cero absoluto</a:t>
@@ -4738,7 +5581,7 @@
                       <a:tailEnd type="none" w="med" len="med"/>
                     </a:lnB>
                     <a:solidFill>
-                      <a:schemeClr val="bg1"/>
+                      <a:srgbClr val="FFFFFF"/>
                     </a:solidFill>
                   </a:tcPr>
                 </a:tc>
@@ -4753,7 +5596,7 @@
                       <a:r>
                         <a:rPr lang="en-US" sz="1300" dirty="0">
                           <a:solidFill>
-                            <a:schemeClr val="tx1"/>
+                            <a:srgbClr val="212529"/>
                           </a:solidFill>
                         </a:rPr>
                         <a:t>−300 °C</a:t>
@@ -4799,7 +5642,7 @@
                       <a:tailEnd type="none" w="med" len="med"/>
                     </a:lnB>
                     <a:solidFill>
-                      <a:schemeClr val="bg1"/>
+                      <a:srgbClr val="FFFFFF"/>
                     </a:solidFill>
                   </a:tcPr>
                 </a:tc>
@@ -4814,7 +5657,7 @@
                       <a:r>
                         <a:rPr lang="en-US" sz="1300" dirty="0">
                           <a:solidFill>
-                            <a:schemeClr val="tx1"/>
+                            <a:srgbClr val="212529"/>
                           </a:solidFill>
                         </a:rPr>
                         <a:t>SOAP Fault con mensaje</a:t>
@@ -4860,7 +5703,7 @@
                       <a:tailEnd type="none" w="med" len="med"/>
                     </a:lnB>
                     <a:solidFill>
-                      <a:schemeClr val="bg1"/>
+                      <a:srgbClr val="FFFFFF"/>
                     </a:solidFill>
                   </a:tcPr>
                 </a:tc>
@@ -4877,10 +5720,10 @@
                       <a:r>
                         <a:rPr lang="en-US" sz="1300" dirty="0">
                           <a:solidFill>
-                            <a:schemeClr val="tx1"/>
+                            <a:srgbClr val="212529"/>
                           </a:solidFill>
                         </a:rPr>
-                        <a:t>Masa negativa</a:t>
+                        <a:t>En red, 3 equipos</a:t>
                       </a:r>
                       <a:endParaRPr lang="en-US" sz="1300" dirty="0"/>
                     </a:p>
@@ -4923,7 +5766,7 @@
                       <a:tailEnd type="none" w="med" len="med"/>
                     </a:lnB>
                     <a:solidFill>
-                      <a:schemeClr val="bg1"/>
+                      <a:srgbClr val="FFFFFF"/>
                     </a:solidFill>
                   </a:tcPr>
                 </a:tc>
@@ -4938,10 +5781,10 @@
                       <a:r>
                         <a:rPr lang="en-US" sz="1300" dirty="0">
                           <a:solidFill>
-                            <a:schemeClr val="tx1"/>
+                            <a:srgbClr val="212529"/>
                           </a:solidFill>
                         </a:rPr>
-                        <a:t>−1 oz</a:t>
+                        <a:t>IP del servidor IIS</a:t>
                       </a:r>
                       <a:endParaRPr lang="en-US" sz="1300" dirty="0"/>
                     </a:p>
@@ -4984,7 +5827,7 @@
                       <a:tailEnd type="none" w="med" len="med"/>
                     </a:lnB>
                     <a:solidFill>
-                      <a:schemeClr val="bg1"/>
+                      <a:srgbClr val="FFFFFF"/>
                     </a:solidFill>
                   </a:tcPr>
                 </a:tc>
@@ -4999,10 +5842,10 @@
                       <a:r>
                         <a:rPr lang="en-US" sz="1300" dirty="0">
                           <a:solidFill>
-                            <a:schemeClr val="tx1"/>
+                            <a:srgbClr val="212529"/>
                           </a:solidFill>
                         </a:rPr>
-                        <a:t>SOAP Fault con mensaje</a:t>
+                        <a:t>Consola, escritorio, web y móvil ✔</a:t>
                       </a:r>
                       <a:endParaRPr lang="en-US" sz="1300" dirty="0"/>
                     </a:p>
@@ -5045,7 +5888,7 @@
                       <a:tailEnd type="none" w="med" len="med"/>
                     </a:lnB>
                     <a:solidFill>
-                      <a:schemeClr val="bg1"/>
+                      <a:srgbClr val="FFFFFF"/>
                     </a:solidFill>
                   </a:tcPr>
                 </a:tc>
@@ -5062,7 +5905,7 @@
                       <a:r>
                         <a:rPr lang="en-US" sz="1300" dirty="0">
                           <a:solidFill>
-                            <a:schemeClr val="tx1"/>
+                            <a:srgbClr val="212529"/>
                           </a:solidFill>
                         </a:rPr>
                         <a:t>Coma decimal</a:t>
@@ -5108,7 +5951,7 @@
                       <a:tailEnd type="none" w="med" len="med"/>
                     </a:lnB>
                     <a:solidFill>
-                      <a:schemeClr val="bg1"/>
+                      <a:srgbClr val="FFFFFF"/>
                     </a:solidFill>
                   </a:tcPr>
                 </a:tc>
@@ -5123,7 +5966,7 @@
                       <a:r>
                         <a:rPr lang="en-US" sz="1300" dirty="0">
                           <a:solidFill>
-                            <a:schemeClr val="tx1"/>
+                            <a:srgbClr val="212529"/>
                           </a:solidFill>
                         </a:rPr>
                         <a:t>42,195 km → mi</a:t>
@@ -5169,7 +6012,7 @@
                       <a:tailEnd type="none" w="med" len="med"/>
                     </a:lnB>
                     <a:solidFill>
-                      <a:schemeClr val="bg1"/>
+                      <a:srgbClr val="FFFFFF"/>
                     </a:solidFill>
                   </a:tcPr>
                 </a:tc>
@@ -5184,7 +6027,7 @@
                       <a:r>
                         <a:rPr lang="en-US" sz="1300" dirty="0">
                           <a:solidFill>
-                            <a:schemeClr val="tx1"/>
+                            <a:srgbClr val="212529"/>
                           </a:solidFill>
                         </a:rPr>
                         <a:t>26.218757</a:t>
@@ -5230,7 +6073,7 @@
                       <a:tailEnd type="none" w="med" len="med"/>
                     </a:lnB>
                     <a:solidFill>
-                      <a:schemeClr val="bg1"/>
+                      <a:srgbClr val="FFFFFF"/>
                     </a:solidFill>
                   </a:tcPr>
                 </a:tc>
@@ -5247,7 +6090,7 @@
                       <a:r>
                         <a:rPr lang="en-US" sz="1300" dirty="0">
                           <a:solidFill>
-                            <a:schemeClr val="tx1"/>
+                            <a:srgbClr val="212529"/>
                           </a:solidFill>
                         </a:rPr>
                         <a:t>Servidor apagado</a:t>
@@ -5293,7 +6136,7 @@
                       <a:tailEnd type="none" w="med" len="med"/>
                     </a:lnB>
                     <a:solidFill>
-                      <a:schemeClr val="bg1"/>
+                      <a:srgbClr val="FFFFFF"/>
                     </a:solidFill>
                   </a:tcPr>
                 </a:tc>
@@ -5308,7 +6151,7 @@
                       <a:r>
                         <a:rPr lang="en-US" sz="1300" dirty="0">
                           <a:solidFill>
-                            <a:schemeClr val="tx1"/>
+                            <a:srgbClr val="212529"/>
                           </a:solidFill>
                         </a:rPr>
                         <a:t>puerto sin servicio</a:t>
@@ -5354,7 +6197,7 @@
                       <a:tailEnd type="none" w="med" len="med"/>
                     </a:lnB>
                     <a:solidFill>
-                      <a:schemeClr val="bg1"/>
+                      <a:srgbClr val="FFFFFF"/>
                     </a:solidFill>
                   </a:tcPr>
                 </a:tc>
@@ -5369,7 +6212,7 @@
                       <a:r>
                         <a:rPr lang="en-US" sz="1300" dirty="0">
                           <a:solidFill>
-                            <a:schemeClr val="tx1"/>
+                            <a:srgbClr val="212529"/>
                           </a:solidFill>
                         </a:rPr>
                         <a:t>«No se pudo conectar…»</a:t>
@@ -5415,7 +6258,7 @@
                       <a:tailEnd type="none" w="med" len="med"/>
                     </a:lnB>
                     <a:solidFill>
-                      <a:schemeClr val="bg1"/>
+                      <a:srgbClr val="FFFFFF"/>
                     </a:solidFill>
                   </a:tcPr>
                 </a:tc>
@@ -5432,7 +6275,7 @@
                       <a:r>
                         <a:rPr lang="en-US" sz="1300" dirty="0">
                           <a:solidFill>
-                            <a:schemeClr val="tx1"/>
+                            <a:srgbClr val="212529"/>
                           </a:solidFill>
                         </a:rPr>
                         <a:t>Página web sin sesión</a:t>
@@ -5478,7 +6321,7 @@
                       <a:tailEnd type="none" w="med" len="med"/>
                     </a:lnB>
                     <a:solidFill>
-                      <a:schemeClr val="bg1"/>
+                      <a:srgbClr val="FFFFFF"/>
                     </a:solidFill>
                   </a:tcPr>
                 </a:tc>
@@ -5493,7 +6336,7 @@
                       <a:r>
                         <a:rPr lang="en-US" sz="1300" dirty="0">
                           <a:solidFill>
-                            <a:schemeClr val="tx1"/>
+                            <a:srgbClr val="212529"/>
                           </a:solidFill>
                         </a:rPr>
                         <a:t>/Conversion</a:t>
@@ -5539,7 +6382,7 @@
                       <a:tailEnd type="none" w="med" len="med"/>
                     </a:lnB>
                     <a:solidFill>
-                      <a:schemeClr val="bg1"/>
+                      <a:srgbClr val="FFFFFF"/>
                     </a:solidFill>
                   </a:tcPr>
                 </a:tc>
@@ -5554,7 +6397,7 @@
                       <a:r>
                         <a:rPr lang="en-US" sz="1300" dirty="0">
                           <a:solidFill>
-                            <a:schemeClr val="tx1"/>
+                            <a:srgbClr val="212529"/>
                           </a:solidFill>
                         </a:rPr>
                         <a:t>Redirige al login</a:t>
@@ -5600,7 +6443,7 @@
                       <a:tailEnd type="none" w="med" len="med"/>
                     </a:lnB>
                     <a:solidFill>
-                      <a:schemeClr val="bg1"/>
+                      <a:srgbClr val="FFFFFF"/>
                     </a:solidFill>
                   </a:tcPr>
                 </a:tc>
@@ -5639,7 +6482,7 @@
             <a:lvl1pPr>
               <a:defRPr sz="1000">
                 <a:solidFill>
-                  <a:schemeClr val="accent6"/>
+                  <a:srgbClr val="6C757D"/>
                 </a:solidFill>
               </a:defRPr>
             </a:lvl1pPr>
@@ -5648,7 +6491,7 @@
             <a:pPr algn="r"/>
             <a:fld id="{F7021451-1387-4CA6-816F-3879F97B5CBC}" type="slidenum">
               <a:rPr b="0" lang="en-US"/>
-              <a:t>12</a:t>
+              <a:t>13</a:t>
             </a:fld>
             <a:endParaRPr lang="en-US"/>
           </a:p>
@@ -5662,9 +6505,9 @@
 </p:sld>
 </file>
 
-<file path=ppt/slides/slide13.xml><?xml version="1.0" encoding="utf-8"?>
+<file path=ppt/slides/slide14.xml><?xml version="1.0" encoding="utf-8"?>
 <p:sld xmlns:a="http://schemas.openxmlformats.org/drawingml/2006/main" xmlns:r="http://schemas.openxmlformats.org/officeDocument/2006/relationships" xmlns:p="http://schemas.openxmlformats.org/presentationml/2006/main">
-  <p:cSld name="Slide 13">
+  <p:cSld name="Slide 14">
     <p:spTree>
       <p:nvGrpSpPr>
         <p:cNvPr id="1" name=""/>
@@ -5708,8 +6551,11 @@
             <a:r>
               <a:rPr lang="en-US" sz="4000" b="1" dirty="0">
                 <a:solidFill>
-                  <a:schemeClr val="bg1"/>
-                </a:solidFill>
+                  <a:srgbClr val="FFFFFF"/>
+                </a:solidFill>
+                <a:latin typeface="Calibri" pitchFamily="34" charset="0"/>
+                <a:ea typeface="Calibri" pitchFamily="34" charset="-122"/>
+                <a:cs typeface="Calibri" pitchFamily="34" charset="-120"/>
               </a:rPr>
               <a:t>Conclusiones</a:t>
             </a:r>
@@ -5732,11 +6578,11 @@
             <a:avLst/>
           </a:prstGeom>
           <a:solidFill>
-            <a:schemeClr val="accent1"/>
+            <a:srgbClr val="006950"/>
           </a:solidFill>
           <a:ln w="12700">
             <a:solidFill>
-              <a:schemeClr val="accent1"/>
+              <a:srgbClr val="006950"/>
             </a:solidFill>
             <a:prstDash val="solid"/>
           </a:ln>
@@ -5769,8 +6615,11 @@
             <a:r>
               <a:rPr lang="en-US" sz="2000" b="1" dirty="0">
                 <a:solidFill>
-                  <a:schemeClr val="bg1"/>
-                </a:solidFill>
+                  <a:srgbClr val="FFFFFF"/>
+                </a:solidFill>
+                <a:latin typeface="Calibri" pitchFamily="34" charset="0"/>
+                <a:ea typeface="Calibri" pitchFamily="34" charset="-122"/>
+                <a:cs typeface="Calibri" pitchFamily="34" charset="-120"/>
               </a:rPr>
               <a:t>1</a:t>
             </a:r>
@@ -5805,10 +6654,13 @@
             <a:r>
               <a:rPr lang="en-US" sz="2100" dirty="0">
                 <a:solidFill>
-                  <a:schemeClr val="bg1"/>
-                </a:solidFill>
-              </a:rPr>
-              <a:t>SOAP permitió que .NET Framework, .NET 8 y Android consuman el mismo servicio sin tocar el servidor.</a:t>
+                  <a:srgbClr val="FFFFFF"/>
+                </a:solidFill>
+                <a:latin typeface="Calibri" pitchFamily="34" charset="0"/>
+                <a:ea typeface="Calibri" pitchFamily="34" charset="-122"/>
+                <a:cs typeface="Calibri" pitchFamily="34" charset="-120"/>
+              </a:rPr>
+              <a:t>SOAP permitió que .NET Framework, .NET 8 y .NET MAUI (Android) consuman el mismo servicio sin tocar el servidor.</a:t>
             </a:r>
             <a:endParaRPr lang="en-US" sz="2100" dirty="0"/>
           </a:p>
@@ -5829,11 +6681,11 @@
             <a:avLst/>
           </a:prstGeom>
           <a:solidFill>
-            <a:schemeClr val="accent1"/>
+            <a:srgbClr val="006950"/>
           </a:solidFill>
           <a:ln w="12700">
             <a:solidFill>
-              <a:schemeClr val="accent1"/>
+              <a:srgbClr val="006950"/>
             </a:solidFill>
             <a:prstDash val="solid"/>
           </a:ln>
@@ -5866,8 +6718,11 @@
             <a:r>
               <a:rPr lang="en-US" sz="2000" b="1" dirty="0">
                 <a:solidFill>
-                  <a:schemeClr val="bg1"/>
-                </a:solidFill>
+                  <a:srgbClr val="FFFFFF"/>
+                </a:solidFill>
+                <a:latin typeface="Calibri" pitchFamily="34" charset="0"/>
+                <a:ea typeface="Calibri" pitchFamily="34" charset="-122"/>
+                <a:cs typeface="Calibri" pitchFamily="34" charset="-120"/>
               </a:rPr>
               <a:t>2</a:t>
             </a:r>
@@ -5902,8 +6757,11 @@
             <a:r>
               <a:rPr lang="en-US" sz="2100" dirty="0">
                 <a:solidFill>
-                  <a:schemeClr val="bg1"/>
-                </a:solidFill>
+                  <a:srgbClr val="FFFFFF"/>
+                </a:solidFill>
+                <a:latin typeface="Calibri" pitchFamily="34" charset="0"/>
+                <a:ea typeface="Calibri" pitchFamily="34" charset="-122"/>
+                <a:cs typeface="Calibri" pitchFamily="34" charset="-120"/>
               </a:rPr>
               <a:t>Validar en el servidor da resultados idénticos en los cuatro clientes y mensajes claros ante valores imposibles.</a:t>
             </a:r>
@@ -5926,11 +6784,11 @@
             <a:avLst/>
           </a:prstGeom>
           <a:solidFill>
-            <a:schemeClr val="accent1"/>
+            <a:srgbClr val="006950"/>
           </a:solidFill>
           <a:ln w="12700">
             <a:solidFill>
-              <a:schemeClr val="accent1"/>
+              <a:srgbClr val="006950"/>
             </a:solidFill>
             <a:prstDash val="solid"/>
           </a:ln>
@@ -5963,8 +6821,11 @@
             <a:r>
               <a:rPr lang="en-US" sz="2000" b="1" dirty="0">
                 <a:solidFill>
-                  <a:schemeClr val="bg1"/>
-                </a:solidFill>
+                  <a:srgbClr val="FFFFFF"/>
+                </a:solidFill>
+                <a:latin typeface="Calibri" pitchFamily="34" charset="0"/>
+                <a:ea typeface="Calibri" pitchFamily="34" charset="-122"/>
+                <a:cs typeface="Calibri" pitchFamily="34" charset="-120"/>
               </a:rPr>
               <a:t>3</a:t>
             </a:r>
@@ -5999,10 +6860,13 @@
             <a:r>
               <a:rPr lang="en-US" sz="2100" dirty="0">
                 <a:solidFill>
-                  <a:schemeClr val="bg1"/>
-                </a:solidFill>
-              </a:rPr>
-              <a:t>Capas en el servidor y MVC en los clientes: una conversión nueva es una línea en el catálogo.</a:t>
+                  <a:srgbClr val="FFFFFF"/>
+                </a:solidFill>
+                <a:latin typeface="Calibri" pitchFamily="34" charset="0"/>
+                <a:ea typeface="Calibri" pitchFamily="34" charset="-122"/>
+                <a:cs typeface="Calibri" pitchFamily="34" charset="-120"/>
+              </a:rPr>
+              <a:t>Capas en el servidor, MVC en los clientes y Singleton para los objetos compartidos: código simple de mantener.</a:t>
             </a:r>
             <a:endParaRPr lang="en-US" sz="2100" dirty="0"/>
           </a:p>
@@ -6023,11 +6887,11 @@
             <a:avLst/>
           </a:prstGeom>
           <a:solidFill>
-            <a:schemeClr val="accent1"/>
+            <a:srgbClr val="006950"/>
           </a:solidFill>
           <a:ln w="12700">
             <a:solidFill>
-              <a:schemeClr val="accent1"/>
+              <a:srgbClr val="006950"/>
             </a:solidFill>
             <a:prstDash val="solid"/>
           </a:ln>
@@ -6060,8 +6924,11 @@
             <a:r>
               <a:rPr lang="en-US" sz="2000" b="1" dirty="0">
                 <a:solidFill>
-                  <a:schemeClr val="bg1"/>
-                </a:solidFill>
+                  <a:srgbClr val="FFFFFF"/>
+                </a:solidFill>
+                <a:latin typeface="Calibri" pitchFamily="34" charset="0"/>
+                <a:ea typeface="Calibri" pitchFamily="34" charset="-122"/>
+                <a:cs typeface="Calibri" pitchFamily="34" charset="-120"/>
               </a:rPr>
               <a:t>4</a:t>
             </a:r>
@@ -6096,8 +6963,11 @@
             <a:r>
               <a:rPr lang="en-US" sz="2100" dirty="0">
                 <a:solidFill>
-                  <a:schemeClr val="bg1"/>
-                </a:solidFill>
+                  <a:srgbClr val="FFFFFF"/>
+                </a:solidFill>
+                <a:latin typeface="Calibri" pitchFamily="34" charset="0"/>
+                <a:ea typeface="Calibri" pitchFamily="34" charset="-122"/>
+                <a:cs typeface="Calibri" pitchFamily="34" charset="-120"/>
               </a:rPr>
               <a:t>Sin base de datos la arquitectura es simple, a cambio de credenciales fijas e historial solo por sesión.</a:t>
             </a:r>
@@ -6159,8 +7029,11 @@
             <a:r>
               <a:rPr lang="en-US" sz="3400" b="1" dirty="0">
                 <a:solidFill>
-                  <a:schemeClr val="tx2"/>
-                </a:solidFill>
+                  <a:srgbClr val="004A38"/>
+                </a:solidFill>
+                <a:latin typeface="Calibri" pitchFamily="34" charset="0"/>
+                <a:ea typeface="Calibri" pitchFamily="34" charset="-122"/>
+                <a:cs typeface="Calibri" pitchFamily="34" charset="-120"/>
               </a:rPr>
               <a:t>Un servicio, cuatro clientes</a:t>
             </a:r>
@@ -6185,7 +7058,7 @@
             </a:avLst>
           </a:prstGeom>
           <a:solidFill>
-            <a:schemeClr val="bg2"/>
+            <a:srgbClr val="F3F6F5"/>
           </a:solidFill>
           <a:ln w="12700">
             <a:solidFill>
@@ -6222,8 +7095,11 @@
             <a:r>
               <a:rPr lang="en-US" sz="6600" b="1" dirty="0">
                 <a:solidFill>
-                  <a:schemeClr val="accent1"/>
-                </a:solidFill>
+                  <a:srgbClr val="006950"/>
+                </a:solidFill>
+                <a:latin typeface="Calibri" pitchFamily="34" charset="0"/>
+                <a:ea typeface="Calibri" pitchFamily="34" charset="-122"/>
+                <a:cs typeface="Calibri" pitchFamily="34" charset="-120"/>
               </a:rPr>
               <a:t>1</a:t>
             </a:r>
@@ -6258,8 +7134,11 @@
             <a:r>
               <a:rPr lang="en-US" sz="1600" dirty="0">
                 <a:solidFill>
-                  <a:schemeClr val="tx1"/>
-                </a:solidFill>
+                  <a:srgbClr val="212529"/>
+                </a:solidFill>
+                <a:latin typeface="Calibri" pitchFamily="34" charset="0"/>
+                <a:ea typeface="Calibri" pitchFamily="34" charset="-122"/>
+                <a:cs typeface="Calibri" pitchFamily="34" charset="-120"/>
               </a:rPr>
               <a:t>servicio SOAP en WCF</a:t>
             </a:r>
@@ -6272,8 +7151,11 @@
             <a:r>
               <a:rPr lang="en-US" sz="1600" dirty="0">
                 <a:solidFill>
-                  <a:schemeClr val="tx1"/>
-                </a:solidFill>
+                  <a:srgbClr val="212529"/>
+                </a:solidFill>
+                <a:latin typeface="Calibri" pitchFamily="34" charset="0"/>
+                <a:ea typeface="Calibri" pitchFamily="34" charset="-122"/>
+                <a:cs typeface="Calibri" pitchFamily="34" charset="-120"/>
               </a:rPr>
               <a:t>publicado en IIS</a:t>
             </a:r>
@@ -6298,7 +7180,7 @@
             </a:avLst>
           </a:prstGeom>
           <a:solidFill>
-            <a:schemeClr val="bg2"/>
+            <a:srgbClr val="F3F6F5"/>
           </a:solidFill>
           <a:ln w="12700">
             <a:solidFill>
@@ -6335,8 +7217,11 @@
             <a:r>
               <a:rPr lang="en-US" sz="6600" b="1" dirty="0">
                 <a:solidFill>
-                  <a:schemeClr val="accent3"/>
-                </a:solidFill>
+                  <a:srgbClr val="1971C2"/>
+                </a:solidFill>
+                <a:latin typeface="Calibri" pitchFamily="34" charset="0"/>
+                <a:ea typeface="Calibri" pitchFamily="34" charset="-122"/>
+                <a:cs typeface="Calibri" pitchFamily="34" charset="-120"/>
               </a:rPr>
               <a:t>4</a:t>
             </a:r>
@@ -6371,8 +7256,11 @@
             <a:r>
               <a:rPr lang="en-US" sz="1600" dirty="0">
                 <a:solidFill>
-                  <a:schemeClr val="tx1"/>
-                </a:solidFill>
+                  <a:srgbClr val="212529"/>
+                </a:solidFill>
+                <a:latin typeface="Calibri" pitchFamily="34" charset="0"/>
+                <a:ea typeface="Calibri" pitchFamily="34" charset="-122"/>
+                <a:cs typeface="Calibri" pitchFamily="34" charset="-120"/>
               </a:rPr>
               <a:t>clientes: consola,</a:t>
             </a:r>
@@ -6385,8 +7273,11 @@
             <a:r>
               <a:rPr lang="en-US" sz="1600" dirty="0">
                 <a:solidFill>
-                  <a:schemeClr val="tx1"/>
-                </a:solidFill>
+                  <a:srgbClr val="212529"/>
+                </a:solidFill>
+                <a:latin typeface="Calibri" pitchFamily="34" charset="0"/>
+                <a:ea typeface="Calibri" pitchFamily="34" charset="-122"/>
+                <a:cs typeface="Calibri" pitchFamily="34" charset="-120"/>
               </a:rPr>
               <a:t>escritorio, web y móvil</a:t>
             </a:r>
@@ -6411,7 +7302,7 @@
             </a:avLst>
           </a:prstGeom>
           <a:solidFill>
-            <a:schemeClr val="bg2"/>
+            <a:srgbClr val="F3F6F5"/>
           </a:solidFill>
           <a:ln w="12700">
             <a:solidFill>
@@ -6448,8 +7339,11 @@
             <a:r>
               <a:rPr lang="en-US" sz="6600" b="1" dirty="0">
                 <a:solidFill>
-                  <a:schemeClr val="accent2"/>
-                </a:solidFill>
+                  <a:srgbClr val="D65D0E"/>
+                </a:solidFill>
+                <a:latin typeface="Calibri" pitchFamily="34" charset="0"/>
+                <a:ea typeface="Calibri" pitchFamily="34" charset="-122"/>
+                <a:cs typeface="Calibri" pitchFamily="34" charset="-120"/>
               </a:rPr>
               <a:t>16</a:t>
             </a:r>
@@ -6484,8 +7378,11 @@
             <a:r>
               <a:rPr lang="en-US" sz="1600" dirty="0">
                 <a:solidFill>
-                  <a:schemeClr val="tx1"/>
-                </a:solidFill>
+                  <a:srgbClr val="212529"/>
+                </a:solidFill>
+                <a:latin typeface="Calibri" pitchFamily="34" charset="0"/>
+                <a:ea typeface="Calibri" pitchFamily="34" charset="-122"/>
+                <a:cs typeface="Calibri" pitchFamily="34" charset="-120"/>
               </a:rPr>
               <a:t>conversiones en</a:t>
             </a:r>
@@ -6498,8 +7395,11 @@
             <a:r>
               <a:rPr lang="en-US" sz="1600" dirty="0">
                 <a:solidFill>
-                  <a:schemeClr val="tx1"/>
-                </a:solidFill>
+                  <a:srgbClr val="212529"/>
+                </a:solidFill>
+                <a:latin typeface="Calibri" pitchFamily="34" charset="0"/>
+                <a:ea typeface="Calibri" pitchFamily="34" charset="-122"/>
+                <a:cs typeface="Calibri" pitchFamily="34" charset="-120"/>
               </a:rPr>
               <a:t>3 categorías + login</a:t>
             </a:r>
@@ -6524,7 +7424,7 @@
             </a:avLst>
           </a:prstGeom>
           <a:solidFill>
-            <a:schemeClr val="bg2"/>
+            <a:srgbClr val="F3F6F5"/>
           </a:solidFill>
           <a:ln w="12700">
             <a:solidFill>
@@ -6561,8 +7461,11 @@
             <a:r>
               <a:rPr lang="en-US" sz="6600" b="1" dirty="0">
                 <a:solidFill>
-                  <a:schemeClr val="accent4"/>
-                </a:solidFill>
+                  <a:srgbClr val="7C3AAD"/>
+                </a:solidFill>
+                <a:latin typeface="Calibri" pitchFamily="34" charset="0"/>
+                <a:ea typeface="Calibri" pitchFamily="34" charset="-122"/>
+                <a:cs typeface="Calibri" pitchFamily="34" charset="-120"/>
               </a:rPr>
               <a:t>0</a:t>
             </a:r>
@@ -6597,8 +7500,11 @@
             <a:r>
               <a:rPr lang="en-US" sz="1600" dirty="0">
                 <a:solidFill>
-                  <a:schemeClr val="tx1"/>
-                </a:solidFill>
+                  <a:srgbClr val="212529"/>
+                </a:solidFill>
+                <a:latin typeface="Calibri" pitchFamily="34" charset="0"/>
+                <a:ea typeface="Calibri" pitchFamily="34" charset="-122"/>
+                <a:cs typeface="Calibri" pitchFamily="34" charset="-120"/>
               </a:rPr>
               <a:t>bases de datos:</a:t>
             </a:r>
@@ -6611,8 +7517,11 @@
             <a:r>
               <a:rPr lang="en-US" sz="1600" dirty="0">
                 <a:solidFill>
-                  <a:schemeClr val="tx1"/>
-                </a:solidFill>
+                  <a:srgbClr val="212529"/>
+                </a:solidFill>
+                <a:latin typeface="Calibri" pitchFamily="34" charset="0"/>
+                <a:ea typeface="Calibri" pitchFamily="34" charset="-122"/>
+                <a:cs typeface="Calibri" pitchFamily="34" charset="-120"/>
               </a:rPr>
               <a:t>todo en memoria</a:t>
             </a:r>
@@ -6647,8 +7556,11 @@
             <a:r>
               <a:rPr lang="en-US" sz="1800" b="1" dirty="0">
                 <a:solidFill>
-                  <a:schemeClr val="tx2"/>
-                </a:solidFill>
+                  <a:srgbClr val="004A38"/>
+                </a:solidFill>
+                <a:latin typeface="Calibri" pitchFamily="34" charset="0"/>
+                <a:ea typeface="Calibri" pitchFamily="34" charset="-122"/>
+                <a:cs typeface="Calibri" pitchFamily="34" charset="-120"/>
               </a:rPr>
               <a:t>Objetivo: </a:t>
             </a:r>
@@ -6658,10 +7570,13 @@
             <a:r>
               <a:rPr lang="en-US" sz="1800" dirty="0">
                 <a:solidFill>
-                  <a:schemeClr val="tx1"/>
-                </a:solidFill>
-              </a:rPr>
-              <a:t>demostrar la interoperabilidad de SOAP: el mismo contrato WSDL lo consumen .NET Framework, .NET 8 y Android sin cambiar el servidor.</a:t>
+                  <a:srgbClr val="212529"/>
+                </a:solidFill>
+                <a:latin typeface="Calibri" pitchFamily="34" charset="0"/>
+                <a:ea typeface="Calibri" pitchFamily="34" charset="-122"/>
+                <a:cs typeface="Calibri" pitchFamily="34" charset="-120"/>
+              </a:rPr>
+              <a:t>demostrar la interoperabilidad de SOAP: el mismo contrato WSDL lo consumen .NET Framework, .NET 8 y .NET MAUI en Android sin cambiar el servidor.</a:t>
             </a:r>
             <a:endParaRPr lang="en-US" sz="1800" dirty="0"/>
           </a:p>
@@ -6697,7 +7612,7 @@
             <a:lvl1pPr>
               <a:defRPr sz="1000">
                 <a:solidFill>
-                  <a:schemeClr val="accent6"/>
+                  <a:srgbClr val="6C757D"/>
                 </a:solidFill>
               </a:defRPr>
             </a:lvl1pPr>
@@ -6766,8 +7681,11 @@
             <a:r>
               <a:rPr lang="en-US" sz="3400" b="1" dirty="0">
                 <a:solidFill>
-                  <a:schemeClr val="tx2"/>
-                </a:solidFill>
+                  <a:srgbClr val="004A38"/>
+                </a:solidFill>
+                <a:latin typeface="Calibri" pitchFamily="34" charset="0"/>
+                <a:ea typeface="Calibri" pitchFamily="34" charset="-122"/>
+                <a:cs typeface="Calibri" pitchFamily="34" charset="-120"/>
               </a:rPr>
               <a:t>Arquitectura de la solución</a:t>
             </a:r>
@@ -6791,8 +7709,8 @@
         </p:blipFill>
         <p:spPr>
           <a:xfrm>
-            <a:off x="1080986" y="1234440"/>
-            <a:ext cx="5884748" cy="4983480"/>
+            <a:off x="1284234" y="1234440"/>
+            <a:ext cx="5478251" cy="4983480"/>
           </a:xfrm>
           <a:prstGeom prst="rect">
             <a:avLst/>
@@ -6814,11 +7732,11 @@
             <a:avLst/>
           </a:prstGeom>
           <a:solidFill>
-            <a:schemeClr val="accent1"/>
+            <a:srgbClr val="006950"/>
           </a:solidFill>
           <a:ln w="12700">
             <a:solidFill>
-              <a:schemeClr val="accent1"/>
+              <a:srgbClr val="006950"/>
             </a:solidFill>
             <a:prstDash val="solid"/>
           </a:ln>
@@ -6851,8 +7769,11 @@
             <a:r>
               <a:rPr lang="en-US" sz="1800" b="1" dirty="0">
                 <a:solidFill>
-                  <a:schemeClr val="bg1"/>
-                </a:solidFill>
+                  <a:srgbClr val="FFFFFF"/>
+                </a:solidFill>
+                <a:latin typeface="Calibri" pitchFamily="34" charset="0"/>
+                <a:ea typeface="Calibri" pitchFamily="34" charset="-122"/>
+                <a:cs typeface="Calibri" pitchFamily="34" charset="-120"/>
               </a:rPr>
               <a:t>1</a:t>
             </a:r>
@@ -6887,8 +7808,11 @@
             <a:r>
               <a:rPr lang="en-US" sz="1800" b="1" dirty="0">
                 <a:solidFill>
-                  <a:schemeClr val="tx2"/>
-                </a:solidFill>
+                  <a:srgbClr val="004A38"/>
+                </a:solidFill>
+                <a:latin typeface="Calibri" pitchFamily="34" charset="0"/>
+                <a:ea typeface="Calibri" pitchFamily="34" charset="-122"/>
+                <a:cs typeface="Calibri" pitchFamily="34" charset="-120"/>
               </a:rPr>
               <a:t>SOAP 1.1</a:t>
             </a:r>
@@ -6923,8 +7847,11 @@
             <a:r>
               <a:rPr lang="en-US" sz="1400" dirty="0">
                 <a:solidFill>
-                  <a:schemeClr val="tx1"/>
-                </a:solidFill>
+                  <a:srgbClr val="212529"/>
+                </a:solidFill>
+                <a:latin typeface="Calibri" pitchFamily="34" charset="0"/>
+                <a:ea typeface="Calibri" pitchFamily="34" charset="-122"/>
+                <a:cs typeface="Calibri" pitchFamily="34" charset="-120"/>
               </a:rPr>
               <a:t>basicHttpBinding sobre HTTP, puerto 8085</a:t>
             </a:r>
@@ -6947,11 +7874,11 @@
             <a:avLst/>
           </a:prstGeom>
           <a:solidFill>
-            <a:schemeClr val="accent3"/>
+            <a:srgbClr val="1971C2"/>
           </a:solidFill>
           <a:ln w="12700">
             <a:solidFill>
-              <a:schemeClr val="accent3"/>
+              <a:srgbClr val="1971C2"/>
             </a:solidFill>
             <a:prstDash val="solid"/>
           </a:ln>
@@ -6984,8 +7911,11 @@
             <a:r>
               <a:rPr lang="en-US" sz="1800" b="1" dirty="0">
                 <a:solidFill>
-                  <a:schemeClr val="bg1"/>
-                </a:solidFill>
+                  <a:srgbClr val="FFFFFF"/>
+                </a:solidFill>
+                <a:latin typeface="Calibri" pitchFamily="34" charset="0"/>
+                <a:ea typeface="Calibri" pitchFamily="34" charset="-122"/>
+                <a:cs typeface="Calibri" pitchFamily="34" charset="-120"/>
               </a:rPr>
               <a:t>2</a:t>
             </a:r>
@@ -7020,8 +7950,11 @@
             <a:r>
               <a:rPr lang="en-US" sz="1800" b="1" dirty="0">
                 <a:solidFill>
-                  <a:schemeClr val="tx2"/>
-                </a:solidFill>
+                  <a:srgbClr val="004A38"/>
+                </a:solidFill>
+                <a:latin typeface="Calibri" pitchFamily="34" charset="0"/>
+                <a:ea typeface="Calibri" pitchFamily="34" charset="-122"/>
+                <a:cs typeface="Calibri" pitchFamily="34" charset="-120"/>
               </a:rPr>
               <a:t>WSDL</a:t>
             </a:r>
@@ -7056,8 +7989,11 @@
             <a:r>
               <a:rPr lang="en-US" sz="1400" dirty="0">
                 <a:solidFill>
-                  <a:schemeClr val="tx1"/>
-                </a:solidFill>
+                  <a:srgbClr val="212529"/>
+                </a:solidFill>
+                <a:latin typeface="Calibri" pitchFamily="34" charset="0"/>
+                <a:ea typeface="Calibri" pitchFamily="34" charset="-122"/>
+                <a:cs typeface="Calibri" pitchFamily="34" charset="-120"/>
               </a:rPr>
               <a:t>…/WSConversion.svc?wsdl describe el contrato</a:t>
             </a:r>
@@ -7080,11 +8016,11 @@
             <a:avLst/>
           </a:prstGeom>
           <a:solidFill>
-            <a:schemeClr val="accent2"/>
+            <a:srgbClr val="D65D0E"/>
           </a:solidFill>
           <a:ln w="12700">
             <a:solidFill>
-              <a:schemeClr val="accent2"/>
+              <a:srgbClr val="D65D0E"/>
             </a:solidFill>
             <a:prstDash val="solid"/>
           </a:ln>
@@ -7117,8 +8053,11 @@
             <a:r>
               <a:rPr lang="en-US" sz="1800" b="1" dirty="0">
                 <a:solidFill>
-                  <a:schemeClr val="bg1"/>
-                </a:solidFill>
+                  <a:srgbClr val="FFFFFF"/>
+                </a:solidFill>
+                <a:latin typeface="Calibri" pitchFamily="34" charset="0"/>
+                <a:ea typeface="Calibri" pitchFamily="34" charset="-122"/>
+                <a:cs typeface="Calibri" pitchFamily="34" charset="-120"/>
               </a:rPr>
               <a:t>3</a:t>
             </a:r>
@@ -7153,8 +8092,11 @@
             <a:r>
               <a:rPr lang="en-US" sz="1800" b="1" dirty="0">
                 <a:solidFill>
-                  <a:schemeClr val="tx2"/>
-                </a:solidFill>
+                  <a:srgbClr val="004A38"/>
+                </a:solidFill>
+                <a:latin typeface="Calibri" pitchFamily="34" charset="0"/>
+                <a:ea typeface="Calibri" pitchFamily="34" charset="-122"/>
+                <a:cs typeface="Calibri" pitchFamily="34" charset="-120"/>
               </a:rPr>
               <a:t>Capas</a:t>
             </a:r>
@@ -7189,8 +8131,11 @@
             <a:r>
               <a:rPr lang="en-US" sz="1400" dirty="0">
                 <a:solidFill>
-                  <a:schemeClr val="tx1"/>
-                </a:solidFill>
+                  <a:srgbClr val="212529"/>
+                </a:solidFill>
+                <a:latin typeface="Calibri" pitchFamily="34" charset="0"/>
+                <a:ea typeface="Calibri" pitchFamily="34" charset="-122"/>
+                <a:cs typeface="Calibri" pitchFamily="34" charset="-120"/>
               </a:rPr>
               <a:t>Contratos → Servicios → Lógica</a:t>
             </a:r>
@@ -7213,11 +8158,11 @@
             <a:avLst/>
           </a:prstGeom>
           <a:solidFill>
-            <a:schemeClr val="accent4"/>
+            <a:srgbClr val="7C3AAD"/>
           </a:solidFill>
           <a:ln w="12700">
             <a:solidFill>
-              <a:schemeClr val="accent4"/>
+              <a:srgbClr val="7C3AAD"/>
             </a:solidFill>
             <a:prstDash val="solid"/>
           </a:ln>
@@ -7250,8 +8195,11 @@
             <a:r>
               <a:rPr lang="en-US" sz="1800" b="1" dirty="0">
                 <a:solidFill>
-                  <a:schemeClr val="bg1"/>
-                </a:solidFill>
+                  <a:srgbClr val="FFFFFF"/>
+                </a:solidFill>
+                <a:latin typeface="Calibri" pitchFamily="34" charset="0"/>
+                <a:ea typeface="Calibri" pitchFamily="34" charset="-122"/>
+                <a:cs typeface="Calibri" pitchFamily="34" charset="-120"/>
               </a:rPr>
               <a:t>4</a:t>
             </a:r>
@@ -7286,8 +8234,11 @@
             <a:r>
               <a:rPr lang="en-US" sz="1800" b="1" dirty="0">
                 <a:solidFill>
-                  <a:schemeClr val="tx2"/>
-                </a:solidFill>
+                  <a:srgbClr val="004A38"/>
+                </a:solidFill>
+                <a:latin typeface="Calibri" pitchFamily="34" charset="0"/>
+                <a:ea typeface="Calibri" pitchFamily="34" charset="-122"/>
+                <a:cs typeface="Calibri" pitchFamily="34" charset="-120"/>
               </a:rPr>
               <a:t>Sin BDD</a:t>
             </a:r>
@@ -7322,8 +8273,11 @@
             <a:r>
               <a:rPr lang="en-US" sz="1400" dirty="0">
                 <a:solidFill>
-                  <a:schemeClr val="tx1"/>
-                </a:solidFill>
+                  <a:srgbClr val="212529"/>
+                </a:solidFill>
+                <a:latin typeface="Calibri" pitchFamily="34" charset="0"/>
+                <a:ea typeface="Calibri" pitchFamily="34" charset="-122"/>
+                <a:cs typeface="Calibri" pitchFamily="34" charset="-120"/>
               </a:rPr>
               <a:t>Credenciales en Web.config, cálculo en memoria</a:t>
             </a:r>
@@ -7361,7 +8315,7 @@
             <a:lvl1pPr>
               <a:defRPr sz="1000">
                 <a:solidFill>
-                  <a:schemeClr val="accent6"/>
+                  <a:srgbClr val="6C757D"/>
                 </a:solidFill>
               </a:defRPr>
             </a:lvl1pPr>
@@ -7430,8 +8384,11 @@
             <a:r>
               <a:rPr lang="en-US" sz="3400" b="1" dirty="0">
                 <a:solidFill>
-                  <a:schemeClr val="tx2"/>
-                </a:solidFill>
+                  <a:srgbClr val="004A38"/>
+                </a:solidFill>
+                <a:latin typeface="Calibri" pitchFamily="34" charset="0"/>
+                <a:ea typeface="Calibri" pitchFamily="34" charset="-122"/>
+                <a:cs typeface="Calibri" pitchFamily="34" charset="-120"/>
               </a:rPr>
               <a:t>El contrato WSConversion</a:t>
             </a:r>
@@ -7456,7 +8413,7 @@
             </a:avLst>
           </a:prstGeom>
           <a:solidFill>
-            <a:schemeClr val="bg2"/>
+            <a:srgbClr val="F3F6F5"/>
           </a:solidFill>
           <a:ln w="12700">
             <a:solidFill>
@@ -7481,11 +8438,11 @@
             <a:avLst/>
           </a:prstGeom>
           <a:solidFill>
-            <a:schemeClr val="accent2"/>
+            <a:srgbClr val="D65D0E"/>
           </a:solidFill>
           <a:ln w="12700">
             <a:solidFill>
-              <a:schemeClr val="accent2"/>
+              <a:srgbClr val="D65D0E"/>
             </a:solidFill>
             <a:prstDash val="solid"/>
           </a:ln>
@@ -7518,8 +8475,11 @@
             <a:r>
               <a:rPr lang="en-US" sz="1800" b="1" dirty="0">
                 <a:solidFill>
-                  <a:schemeClr val="bg1"/>
-                </a:solidFill>
+                  <a:srgbClr val="FFFFFF"/>
+                </a:solidFill>
+                <a:latin typeface="Calibri" pitchFamily="34" charset="0"/>
+                <a:ea typeface="Calibri" pitchFamily="34" charset="-122"/>
+                <a:cs typeface="Calibri" pitchFamily="34" charset="-120"/>
               </a:rPr>
               <a:t>°C</a:t>
             </a:r>
@@ -7554,8 +8514,11 @@
             <a:r>
               <a:rPr lang="en-US" sz="2200" b="1" dirty="0">
                 <a:solidFill>
-                  <a:schemeClr val="accent2"/>
-                </a:solidFill>
+                  <a:srgbClr val="D65D0E"/>
+                </a:solidFill>
+                <a:latin typeface="Calibri" pitchFamily="34" charset="0"/>
+                <a:ea typeface="Calibri" pitchFamily="34" charset="-122"/>
+                <a:cs typeface="Calibri" pitchFamily="34" charset="-120"/>
               </a:rPr>
               <a:t>Temperatura</a:t>
             </a:r>
@@ -7593,7 +8556,7 @@
             <a:r>
               <a:rPr lang="en-US" sz="1300" dirty="0">
                 <a:solidFill>
-                  <a:schemeClr val="tx1"/>
+                  <a:srgbClr val="212529"/>
                 </a:solidFill>
                 <a:latin typeface="Consolas" pitchFamily="34" charset="0"/>
                 <a:ea typeface="Consolas" pitchFamily="34" charset="-122"/>
@@ -7613,7 +8576,7 @@
             <a:r>
               <a:rPr lang="en-US" sz="1300" dirty="0">
                 <a:solidFill>
-                  <a:schemeClr val="tx1"/>
+                  <a:srgbClr val="212529"/>
                 </a:solidFill>
                 <a:latin typeface="Consolas" pitchFamily="34" charset="0"/>
                 <a:ea typeface="Consolas" pitchFamily="34" charset="-122"/>
@@ -7633,7 +8596,7 @@
             <a:r>
               <a:rPr lang="en-US" sz="1300" dirty="0">
                 <a:solidFill>
-                  <a:schemeClr val="tx1"/>
+                  <a:srgbClr val="212529"/>
                 </a:solidFill>
                 <a:latin typeface="Consolas" pitchFamily="34" charset="0"/>
                 <a:ea typeface="Consolas" pitchFamily="34" charset="-122"/>
@@ -7653,7 +8616,7 @@
             <a:r>
               <a:rPr lang="en-US" sz="1300" dirty="0">
                 <a:solidFill>
-                  <a:schemeClr val="tx1"/>
+                  <a:srgbClr val="212529"/>
                 </a:solidFill>
                 <a:latin typeface="Consolas" pitchFamily="34" charset="0"/>
                 <a:ea typeface="Consolas" pitchFamily="34" charset="-122"/>
@@ -7673,7 +8636,7 @@
             <a:r>
               <a:rPr lang="en-US" sz="1300" dirty="0">
                 <a:solidFill>
-                  <a:schemeClr val="tx1"/>
+                  <a:srgbClr val="212529"/>
                 </a:solidFill>
                 <a:latin typeface="Consolas" pitchFamily="34" charset="0"/>
                 <a:ea typeface="Consolas" pitchFamily="34" charset="-122"/>
@@ -7693,7 +8656,7 @@
             <a:r>
               <a:rPr lang="en-US" sz="1300" dirty="0">
                 <a:solidFill>
-                  <a:schemeClr val="tx1"/>
+                  <a:srgbClr val="212529"/>
                 </a:solidFill>
                 <a:latin typeface="Consolas" pitchFamily="34" charset="0"/>
                 <a:ea typeface="Consolas" pitchFamily="34" charset="-122"/>
@@ -7732,8 +8695,11 @@
             <a:r>
               <a:rPr lang="en-US" sz="1300" i="1" dirty="0">
                 <a:solidFill>
-                  <a:schemeClr val="tx2"/>
-                </a:solidFill>
+                  <a:srgbClr val="004A38"/>
+                </a:solidFill>
+                <a:latin typeface="Calibri" pitchFamily="34" charset="0"/>
+                <a:ea typeface="Calibri" pitchFamily="34" charset="-122"/>
+                <a:cs typeface="Calibri" pitchFamily="34" charset="-120"/>
               </a:rPr>
               <a:t>Nunca bajo el cero absoluto</a:t>
             </a:r>
@@ -7746,8 +8712,11 @@
             <a:r>
               <a:rPr lang="en-US" sz="1300" i="1" dirty="0">
                 <a:solidFill>
-                  <a:schemeClr val="tx2"/>
-                </a:solidFill>
+                  <a:srgbClr val="004A38"/>
+                </a:solidFill>
+                <a:latin typeface="Calibri" pitchFamily="34" charset="0"/>
+                <a:ea typeface="Calibri" pitchFamily="34" charset="-122"/>
+                <a:cs typeface="Calibri" pitchFamily="34" charset="-120"/>
               </a:rPr>
               <a:t>(−273.15 °C · −459.67 °F · 0 K)</a:t>
             </a:r>
@@ -7772,7 +8741,7 @@
             </a:avLst>
           </a:prstGeom>
           <a:solidFill>
-            <a:schemeClr val="bg2"/>
+            <a:srgbClr val="F3F6F5"/>
           </a:solidFill>
           <a:ln w="12700">
             <a:solidFill>
@@ -7797,11 +8766,11 @@
             <a:avLst/>
           </a:prstGeom>
           <a:solidFill>
-            <a:schemeClr val="accent3"/>
+            <a:srgbClr val="1971C2"/>
           </a:solidFill>
           <a:ln w="12700">
             <a:solidFill>
-              <a:schemeClr val="accent3"/>
+              <a:srgbClr val="1971C2"/>
             </a:solidFill>
             <a:prstDash val="solid"/>
           </a:ln>
@@ -7834,8 +8803,11 @@
             <a:r>
               <a:rPr lang="en-US" sz="1800" b="1" dirty="0">
                 <a:solidFill>
-                  <a:schemeClr val="bg1"/>
-                </a:solidFill>
+                  <a:srgbClr val="FFFFFF"/>
+                </a:solidFill>
+                <a:latin typeface="Calibri" pitchFamily="34" charset="0"/>
+                <a:ea typeface="Calibri" pitchFamily="34" charset="-122"/>
+                <a:cs typeface="Calibri" pitchFamily="34" charset="-120"/>
               </a:rPr>
               <a:t>m</a:t>
             </a:r>
@@ -7870,8 +8842,11 @@
             <a:r>
               <a:rPr lang="en-US" sz="2200" b="1" dirty="0">
                 <a:solidFill>
-                  <a:schemeClr val="accent3"/>
-                </a:solidFill>
+                  <a:srgbClr val="1971C2"/>
+                </a:solidFill>
+                <a:latin typeface="Calibri" pitchFamily="34" charset="0"/>
+                <a:ea typeface="Calibri" pitchFamily="34" charset="-122"/>
+                <a:cs typeface="Calibri" pitchFamily="34" charset="-120"/>
               </a:rPr>
               <a:t>Longitud</a:t>
             </a:r>
@@ -7909,7 +8884,7 @@
             <a:r>
               <a:rPr lang="en-US" sz="1300" dirty="0">
                 <a:solidFill>
-                  <a:schemeClr val="tx1"/>
+                  <a:srgbClr val="212529"/>
                 </a:solidFill>
                 <a:latin typeface="Consolas" pitchFamily="34" charset="0"/>
                 <a:ea typeface="Consolas" pitchFamily="34" charset="-122"/>
@@ -7929,7 +8904,7 @@
             <a:r>
               <a:rPr lang="en-US" sz="1300" dirty="0">
                 <a:solidFill>
-                  <a:schemeClr val="tx1"/>
+                  <a:srgbClr val="212529"/>
                 </a:solidFill>
                 <a:latin typeface="Consolas" pitchFamily="34" charset="0"/>
                 <a:ea typeface="Consolas" pitchFamily="34" charset="-122"/>
@@ -7949,7 +8924,7 @@
             <a:r>
               <a:rPr lang="en-US" sz="1300" dirty="0">
                 <a:solidFill>
-                  <a:schemeClr val="tx1"/>
+                  <a:srgbClr val="212529"/>
                 </a:solidFill>
                 <a:latin typeface="Consolas" pitchFamily="34" charset="0"/>
                 <a:ea typeface="Consolas" pitchFamily="34" charset="-122"/>
@@ -7969,7 +8944,7 @@
             <a:r>
               <a:rPr lang="en-US" sz="1300" dirty="0">
                 <a:solidFill>
-                  <a:schemeClr val="tx1"/>
+                  <a:srgbClr val="212529"/>
                 </a:solidFill>
                 <a:latin typeface="Consolas" pitchFamily="34" charset="0"/>
                 <a:ea typeface="Consolas" pitchFamily="34" charset="-122"/>
@@ -7989,7 +8964,7 @@
             <a:r>
               <a:rPr lang="en-US" sz="1300" dirty="0">
                 <a:solidFill>
-                  <a:schemeClr val="tx1"/>
+                  <a:srgbClr val="212529"/>
                 </a:solidFill>
                 <a:latin typeface="Consolas" pitchFamily="34" charset="0"/>
                 <a:ea typeface="Consolas" pitchFamily="34" charset="-122"/>
@@ -8009,7 +8984,7 @@
             <a:r>
               <a:rPr lang="en-US" sz="1300" dirty="0">
                 <a:solidFill>
-                  <a:schemeClr val="tx1"/>
+                  <a:srgbClr val="212529"/>
                 </a:solidFill>
                 <a:latin typeface="Consolas" pitchFamily="34" charset="0"/>
                 <a:ea typeface="Consolas" pitchFamily="34" charset="-122"/>
@@ -8048,8 +9023,11 @@
             <a:r>
               <a:rPr lang="en-US" sz="1300" i="1" dirty="0">
                 <a:solidFill>
-                  <a:schemeClr val="tx2"/>
-                </a:solidFill>
+                  <a:srgbClr val="004A38"/>
+                </a:solidFill>
+                <a:latin typeface="Calibri" pitchFamily="34" charset="0"/>
+                <a:ea typeface="Calibri" pitchFamily="34" charset="-122"/>
+                <a:cs typeface="Calibri" pitchFamily="34" charset="-120"/>
               </a:rPr>
               <a:t>No negativa</a:t>
             </a:r>
@@ -8062,8 +9040,11 @@
             <a:r>
               <a:rPr lang="en-US" sz="1300" i="1" dirty="0">
                 <a:solidFill>
-                  <a:schemeClr val="tx2"/>
-                </a:solidFill>
+                  <a:srgbClr val="004A38"/>
+                </a:solidFill>
+                <a:latin typeface="Calibri" pitchFamily="34" charset="0"/>
+                <a:ea typeface="Calibri" pitchFamily="34" charset="-122"/>
+                <a:cs typeface="Calibri" pitchFamily="34" charset="-120"/>
               </a:rPr>
               <a:t>1 ft = 0.3048 m · 1 mi = 1.609344 km</a:t>
             </a:r>
@@ -8088,7 +9069,7 @@
             </a:avLst>
           </a:prstGeom>
           <a:solidFill>
-            <a:schemeClr val="bg2"/>
+            <a:srgbClr val="F3F6F5"/>
           </a:solidFill>
           <a:ln w="12700">
             <a:solidFill>
@@ -8113,11 +9094,11 @@
             <a:avLst/>
           </a:prstGeom>
           <a:solidFill>
-            <a:schemeClr val="accent4"/>
+            <a:srgbClr val="7C3AAD"/>
           </a:solidFill>
           <a:ln w="12700">
             <a:solidFill>
-              <a:schemeClr val="accent4"/>
+              <a:srgbClr val="7C3AAD"/>
             </a:solidFill>
             <a:prstDash val="solid"/>
           </a:ln>
@@ -8150,8 +9131,11 @@
             <a:r>
               <a:rPr lang="en-US" sz="1800" b="1" dirty="0">
                 <a:solidFill>
-                  <a:schemeClr val="bg1"/>
-                </a:solidFill>
+                  <a:srgbClr val="FFFFFF"/>
+                </a:solidFill>
+                <a:latin typeface="Calibri" pitchFamily="34" charset="0"/>
+                <a:ea typeface="Calibri" pitchFamily="34" charset="-122"/>
+                <a:cs typeface="Calibri" pitchFamily="34" charset="-120"/>
               </a:rPr>
               <a:t>kg</a:t>
             </a:r>
@@ -8186,8 +9170,11 @@
             <a:r>
               <a:rPr lang="en-US" sz="2200" b="1" dirty="0">
                 <a:solidFill>
-                  <a:schemeClr val="accent4"/>
-                </a:solidFill>
+                  <a:srgbClr val="7C3AAD"/>
+                </a:solidFill>
+                <a:latin typeface="Calibri" pitchFamily="34" charset="0"/>
+                <a:ea typeface="Calibri" pitchFamily="34" charset="-122"/>
+                <a:cs typeface="Calibri" pitchFamily="34" charset="-120"/>
               </a:rPr>
               <a:t>Masa</a:t>
             </a:r>
@@ -8225,7 +9212,7 @@
             <a:r>
               <a:rPr lang="en-US" sz="1300" dirty="0">
                 <a:solidFill>
-                  <a:schemeClr val="tx1"/>
+                  <a:srgbClr val="212529"/>
                 </a:solidFill>
                 <a:latin typeface="Consolas" pitchFamily="34" charset="0"/>
                 <a:ea typeface="Consolas" pitchFamily="34" charset="-122"/>
@@ -8245,7 +9232,7 @@
             <a:r>
               <a:rPr lang="en-US" sz="1300" dirty="0">
                 <a:solidFill>
-                  <a:schemeClr val="tx1"/>
+                  <a:srgbClr val="212529"/>
                 </a:solidFill>
                 <a:latin typeface="Consolas" pitchFamily="34" charset="0"/>
                 <a:ea typeface="Consolas" pitchFamily="34" charset="-122"/>
@@ -8265,7 +9252,7 @@
             <a:r>
               <a:rPr lang="en-US" sz="1300" dirty="0">
                 <a:solidFill>
-                  <a:schemeClr val="tx1"/>
+                  <a:srgbClr val="212529"/>
                 </a:solidFill>
                 <a:latin typeface="Consolas" pitchFamily="34" charset="0"/>
                 <a:ea typeface="Consolas" pitchFamily="34" charset="-122"/>
@@ -8285,7 +9272,7 @@
             <a:r>
               <a:rPr lang="en-US" sz="1300" dirty="0">
                 <a:solidFill>
-                  <a:schemeClr val="tx1"/>
+                  <a:srgbClr val="212529"/>
                 </a:solidFill>
                 <a:latin typeface="Consolas" pitchFamily="34" charset="0"/>
                 <a:ea typeface="Consolas" pitchFamily="34" charset="-122"/>
@@ -8324,8 +9311,11 @@
             <a:r>
               <a:rPr lang="en-US" sz="1300" i="1" dirty="0">
                 <a:solidFill>
-                  <a:schemeClr val="tx2"/>
-                </a:solidFill>
+                  <a:srgbClr val="004A38"/>
+                </a:solidFill>
+                <a:latin typeface="Calibri" pitchFamily="34" charset="0"/>
+                <a:ea typeface="Calibri" pitchFamily="34" charset="-122"/>
+                <a:cs typeface="Calibri" pitchFamily="34" charset="-120"/>
               </a:rPr>
               <a:t>No negativa</a:t>
             </a:r>
@@ -8338,8 +9328,11 @@
             <a:r>
               <a:rPr lang="en-US" sz="1300" i="1" dirty="0">
                 <a:solidFill>
-                  <a:schemeClr val="tx2"/>
-                </a:solidFill>
+                  <a:srgbClr val="004A38"/>
+                </a:solidFill>
+                <a:latin typeface="Calibri" pitchFamily="34" charset="0"/>
+                <a:ea typeface="Calibri" pitchFamily="34" charset="-122"/>
+                <a:cs typeface="Calibri" pitchFamily="34" charset="-120"/>
               </a:rPr>
               <a:t>1 lb = 0.45359237 kg · 1 oz = 28.349523125 g</a:t>
             </a:r>
@@ -8374,8 +9367,11 @@
             <a:r>
               <a:rPr lang="en-US" sz="1500" b="1" dirty="0">
                 <a:solidFill>
-                  <a:schemeClr val="tx2"/>
-                </a:solidFill>
+                  <a:srgbClr val="004A38"/>
+                </a:solidFill>
+                <a:latin typeface="Calibri" pitchFamily="34" charset="0"/>
+                <a:ea typeface="Calibri" pitchFamily="34" charset="-122"/>
+                <a:cs typeface="Calibri" pitchFamily="34" charset="-120"/>
               </a:rPr>
               <a:t>+ login(usuario, clave) → bool     ·     Errores: SOAP Fault con ErrorServicio { Codigo, Mensaje }</a:t>
             </a:r>
@@ -8413,7 +9409,7 @@
             <a:lvl1pPr>
               <a:defRPr sz="1000">
                 <a:solidFill>
-                  <a:schemeClr val="accent6"/>
+                  <a:srgbClr val="6C757D"/>
                 </a:solidFill>
               </a:defRPr>
             </a:lvl1pPr>
@@ -8482,8 +9478,11 @@
             <a:r>
               <a:rPr lang="en-US" sz="3400" b="1" dirty="0">
                 <a:solidFill>
-                  <a:schemeClr val="tx2"/>
-                </a:solidFill>
+                  <a:srgbClr val="004A38"/>
+                </a:solidFill>
+                <a:latin typeface="Calibri" pitchFamily="34" charset="0"/>
+                <a:ea typeface="Calibri" pitchFamily="34" charset="-122"/>
+                <a:cs typeface="Calibri" pitchFamily="34" charset="-120"/>
               </a:rPr>
               <a:t>Así viaja una conversión por SOAP</a:t>
             </a:r>
@@ -8518,8 +9517,11 @@
             <a:r>
               <a:rPr lang="en-US" sz="1800" b="1" dirty="0">
                 <a:solidFill>
-                  <a:schemeClr val="accent1"/>
-                </a:solidFill>
+                  <a:srgbClr val="006950"/>
+                </a:solidFill>
+                <a:latin typeface="Calibri" pitchFamily="34" charset="0"/>
+                <a:ea typeface="Calibri" pitchFamily="34" charset="-122"/>
+                <a:cs typeface="Calibri" pitchFamily="34" charset="-120"/>
               </a:rPr>
               <a:t>Petición</a:t>
             </a:r>
@@ -8544,7 +9546,7 @@
             </a:avLst>
           </a:prstGeom>
           <a:solidFill>
-            <a:schemeClr val="bg2"/>
+            <a:srgbClr val="F3F6F5"/>
           </a:solidFill>
           <a:ln w="12700">
             <a:solidFill>
@@ -8581,7 +9583,7 @@
             <a:r>
               <a:rPr lang="en-US" sz="1400" dirty="0">
                 <a:solidFill>
-                  <a:schemeClr val="tx1"/>
+                  <a:srgbClr val="212529"/>
                 </a:solidFill>
                 <a:latin typeface="Consolas" pitchFamily="34" charset="0"/>
                 <a:ea typeface="Consolas" pitchFamily="34" charset="-122"/>
@@ -8598,7 +9600,7 @@
             <a:r>
               <a:rPr lang="en-US" sz="1400" dirty="0">
                 <a:solidFill>
-                  <a:schemeClr val="tx1"/>
+                  <a:srgbClr val="212529"/>
                 </a:solidFill>
                 <a:latin typeface="Consolas" pitchFamily="34" charset="0"/>
                 <a:ea typeface="Consolas" pitchFamily="34" charset="-122"/>
@@ -8615,7 +9617,7 @@
             <a:r>
               <a:rPr lang="en-US" sz="1400" dirty="0">
                 <a:solidFill>
-                  <a:schemeClr val="tx1"/>
+                  <a:srgbClr val="212529"/>
                 </a:solidFill>
                 <a:latin typeface="Consolas" pitchFamily="34" charset="0"/>
                 <a:ea typeface="Consolas" pitchFamily="34" charset="-122"/>
@@ -8638,7 +9640,7 @@
             <a:r>
               <a:rPr lang="en-US" sz="1400" dirty="0">
                 <a:solidFill>
-                  <a:schemeClr val="tx1"/>
+                  <a:srgbClr val="212529"/>
                 </a:solidFill>
                 <a:latin typeface="Consolas" pitchFamily="34" charset="0"/>
                 <a:ea typeface="Consolas" pitchFamily="34" charset="-122"/>
@@ -8655,7 +9657,7 @@
             <a:r>
               <a:rPr lang="en-US" sz="1400" dirty="0">
                 <a:solidFill>
-                  <a:schemeClr val="tx1"/>
+                  <a:srgbClr val="212529"/>
                 </a:solidFill>
                 <a:latin typeface="Consolas" pitchFamily="34" charset="0"/>
                 <a:ea typeface="Consolas" pitchFamily="34" charset="-122"/>
@@ -8672,7 +9674,7 @@
             <a:r>
               <a:rPr lang="en-US" sz="1400" dirty="0">
                 <a:solidFill>
-                  <a:schemeClr val="tx1"/>
+                  <a:srgbClr val="212529"/>
                 </a:solidFill>
                 <a:latin typeface="Consolas" pitchFamily="34" charset="0"/>
                 <a:ea typeface="Consolas" pitchFamily="34" charset="-122"/>
@@ -8689,7 +9691,7 @@
             <a:r>
               <a:rPr lang="en-US" sz="1400" dirty="0">
                 <a:solidFill>
-                  <a:schemeClr val="tx1"/>
+                  <a:srgbClr val="212529"/>
                 </a:solidFill>
                 <a:latin typeface="Consolas" pitchFamily="34" charset="0"/>
                 <a:ea typeface="Consolas" pitchFamily="34" charset="-122"/>
@@ -8706,7 +9708,7 @@
             <a:r>
               <a:rPr lang="en-US" sz="1400" dirty="0">
                 <a:solidFill>
-                  <a:schemeClr val="tx1"/>
+                  <a:srgbClr val="212529"/>
                 </a:solidFill>
                 <a:latin typeface="Consolas" pitchFamily="34" charset="0"/>
                 <a:ea typeface="Consolas" pitchFamily="34" charset="-122"/>
@@ -8723,7 +9725,7 @@
             <a:r>
               <a:rPr lang="en-US" sz="1400" dirty="0">
                 <a:solidFill>
-                  <a:schemeClr val="tx1"/>
+                  <a:srgbClr val="212529"/>
                 </a:solidFill>
                 <a:latin typeface="Consolas" pitchFamily="34" charset="0"/>
                 <a:ea typeface="Consolas" pitchFamily="34" charset="-122"/>
@@ -8740,7 +9742,7 @@
             <a:r>
               <a:rPr lang="en-US" sz="1400" dirty="0">
                 <a:solidFill>
-                  <a:schemeClr val="tx1"/>
+                  <a:srgbClr val="212529"/>
                 </a:solidFill>
                 <a:latin typeface="Consolas" pitchFamily="34" charset="0"/>
                 <a:ea typeface="Consolas" pitchFamily="34" charset="-122"/>
@@ -8757,7 +9759,7 @@
             <a:r>
               <a:rPr lang="en-US" sz="1400" dirty="0">
                 <a:solidFill>
-                  <a:schemeClr val="tx1"/>
+                  <a:srgbClr val="212529"/>
                 </a:solidFill>
                 <a:latin typeface="Consolas" pitchFamily="34" charset="0"/>
                 <a:ea typeface="Consolas" pitchFamily="34" charset="-122"/>
@@ -8796,8 +9798,11 @@
             <a:r>
               <a:rPr lang="en-US" sz="1800" b="1" dirty="0">
                 <a:solidFill>
-                  <a:schemeClr val="accent3"/>
-                </a:solidFill>
+                  <a:srgbClr val="1971C2"/>
+                </a:solidFill>
+                <a:latin typeface="Calibri" pitchFamily="34" charset="0"/>
+                <a:ea typeface="Calibri" pitchFamily="34" charset="-122"/>
+                <a:cs typeface="Calibri" pitchFamily="34" charset="-120"/>
               </a:rPr>
               <a:t>Respuesta correcta</a:t>
             </a:r>
@@ -8822,7 +9827,7 @@
             </a:avLst>
           </a:prstGeom>
           <a:solidFill>
-            <a:schemeClr val="bg2"/>
+            <a:srgbClr val="F3F6F5"/>
           </a:solidFill>
           <a:ln w="12700">
             <a:solidFill>
@@ -8859,7 +9864,7 @@
             <a:r>
               <a:rPr lang="en-US" sz="1400" dirty="0">
                 <a:solidFill>
-                  <a:schemeClr val="tx1"/>
+                  <a:srgbClr val="212529"/>
                 </a:solidFill>
                 <a:latin typeface="Consolas" pitchFamily="34" charset="0"/>
                 <a:ea typeface="Consolas" pitchFamily="34" charset="-122"/>
@@ -8876,7 +9881,7 @@
             <a:r>
               <a:rPr lang="en-US" sz="1400" dirty="0">
                 <a:solidFill>
-                  <a:schemeClr val="tx1"/>
+                  <a:srgbClr val="212529"/>
                 </a:solidFill>
                 <a:latin typeface="Consolas" pitchFamily="34" charset="0"/>
                 <a:ea typeface="Consolas" pitchFamily="34" charset="-122"/>
@@ -8893,7 +9898,7 @@
             <a:r>
               <a:rPr lang="en-US" sz="1400" dirty="0">
                 <a:solidFill>
-                  <a:schemeClr val="tx1"/>
+                  <a:srgbClr val="212529"/>
                 </a:solidFill>
                 <a:latin typeface="Consolas" pitchFamily="34" charset="0"/>
                 <a:ea typeface="Consolas" pitchFamily="34" charset="-122"/>
@@ -8910,7 +9915,7 @@
             <a:r>
               <a:rPr lang="en-US" sz="1400" dirty="0">
                 <a:solidFill>
-                  <a:schemeClr val="tx1"/>
+                  <a:srgbClr val="212529"/>
                 </a:solidFill>
                 <a:latin typeface="Consolas" pitchFamily="34" charset="0"/>
                 <a:ea typeface="Consolas" pitchFamily="34" charset="-122"/>
@@ -8949,8 +9954,11 @@
             <a:r>
               <a:rPr lang="en-US" sz="1800" b="1" dirty="0">
                 <a:solidFill>
-                  <a:schemeClr val="accent5"/>
-                </a:solidFill>
+                  <a:srgbClr val="C0392B"/>
+                </a:solidFill>
+                <a:latin typeface="Calibri" pitchFamily="34" charset="0"/>
+                <a:ea typeface="Calibri" pitchFamily="34" charset="-122"/>
+                <a:cs typeface="Calibri" pitchFamily="34" charset="-120"/>
               </a:rPr>
               <a:t>Valor imposible (−300 °C)</a:t>
             </a:r>
@@ -9012,7 +10020,7 @@
             <a:r>
               <a:rPr lang="en-US" sz="1400" dirty="0">
                 <a:solidFill>
-                  <a:schemeClr val="tx1"/>
+                  <a:srgbClr val="212529"/>
                 </a:solidFill>
                 <a:latin typeface="Consolas" pitchFamily="34" charset="0"/>
                 <a:ea typeface="Consolas" pitchFamily="34" charset="-122"/>
@@ -9029,7 +10037,7 @@
             <a:r>
               <a:rPr lang="en-US" sz="1400" dirty="0">
                 <a:solidFill>
-                  <a:schemeClr val="tx1"/>
+                  <a:srgbClr val="212529"/>
                 </a:solidFill>
                 <a:latin typeface="Consolas" pitchFamily="34" charset="0"/>
                 <a:ea typeface="Consolas" pitchFamily="34" charset="-122"/>
@@ -9046,7 +10054,7 @@
             <a:r>
               <a:rPr lang="en-US" sz="1400" dirty="0">
                 <a:solidFill>
-                  <a:schemeClr val="tx1"/>
+                  <a:srgbClr val="212529"/>
                 </a:solidFill>
                 <a:latin typeface="Consolas" pitchFamily="34" charset="0"/>
                 <a:ea typeface="Consolas" pitchFamily="34" charset="-122"/>
@@ -9063,7 +10071,7 @@
             <a:r>
               <a:rPr lang="en-US" sz="1400" dirty="0">
                 <a:solidFill>
-                  <a:schemeClr val="tx1"/>
+                  <a:srgbClr val="212529"/>
                 </a:solidFill>
                 <a:latin typeface="Consolas" pitchFamily="34" charset="0"/>
                 <a:ea typeface="Consolas" pitchFamily="34" charset="-122"/>
@@ -9080,7 +10088,7 @@
             <a:r>
               <a:rPr lang="en-US" sz="1400" dirty="0">
                 <a:solidFill>
-                  <a:schemeClr val="tx1"/>
+                  <a:srgbClr val="212529"/>
                 </a:solidFill>
                 <a:latin typeface="Consolas" pitchFamily="34" charset="0"/>
                 <a:ea typeface="Consolas" pitchFamily="34" charset="-122"/>
@@ -9097,7 +10105,7 @@
             <a:r>
               <a:rPr lang="en-US" sz="1400" dirty="0">
                 <a:solidFill>
-                  <a:schemeClr val="tx1"/>
+                  <a:srgbClr val="212529"/>
                 </a:solidFill>
                 <a:latin typeface="Consolas" pitchFamily="34" charset="0"/>
                 <a:ea typeface="Consolas" pitchFamily="34" charset="-122"/>
@@ -9139,7 +10147,7 @@
             <a:lvl1pPr>
               <a:defRPr sz="1000">
                 <a:solidFill>
-                  <a:schemeClr val="accent6"/>
+                  <a:srgbClr val="6C757D"/>
                 </a:solidFill>
               </a:defRPr>
             </a:lvl1pPr>
@@ -9208,8 +10216,11 @@
             <a:r>
               <a:rPr lang="en-US" sz="3400" b="1" dirty="0">
                 <a:solidFill>
-                  <a:schemeClr val="tx2"/>
-                </a:solidFill>
+                  <a:srgbClr val="004A38"/>
+                </a:solidFill>
+                <a:latin typeface="Calibri" pitchFamily="34" charset="0"/>
+                <a:ea typeface="Calibri" pitchFamily="34" charset="-122"/>
+                <a:cs typeface="Calibri" pitchFamily="34" charset="-120"/>
               </a:rPr>
               <a:t>Decisiones de diseño</a:t>
             </a:r>
@@ -9234,7 +10245,7 @@
             </a:avLst>
           </a:prstGeom>
           <a:solidFill>
-            <a:schemeClr val="bg2"/>
+            <a:srgbClr val="F3F6F5"/>
           </a:solidFill>
           <a:ln w="12700">
             <a:solidFill>
@@ -9259,11 +10270,11 @@
             <a:avLst/>
           </a:prstGeom>
           <a:solidFill>
-            <a:schemeClr val="accent1"/>
+            <a:srgbClr val="006950"/>
           </a:solidFill>
           <a:ln w="12700">
             <a:solidFill>
-              <a:schemeClr val="accent1"/>
+              <a:srgbClr val="006950"/>
             </a:solidFill>
             <a:prstDash val="solid"/>
           </a:ln>
@@ -9296,8 +10307,11 @@
             <a:r>
               <a:rPr lang="en-US" sz="1800" b="1" dirty="0">
                 <a:solidFill>
-                  <a:schemeClr val="bg1"/>
-                </a:solidFill>
+                  <a:srgbClr val="FFFFFF"/>
+                </a:solidFill>
+                <a:latin typeface="Calibri" pitchFamily="34" charset="0"/>
+                <a:ea typeface="Calibri" pitchFamily="34" charset="-122"/>
+                <a:cs typeface="Calibri" pitchFamily="34" charset="-120"/>
               </a:rPr>
               <a:t>1</a:t>
             </a:r>
@@ -9332,8 +10346,11 @@
             <a:r>
               <a:rPr lang="en-US" sz="1700" b="1" dirty="0">
                 <a:solidFill>
-                  <a:schemeClr val="tx2"/>
-                </a:solidFill>
+                  <a:srgbClr val="004A38"/>
+                </a:solidFill>
+                <a:latin typeface="Calibri" pitchFamily="34" charset="0"/>
+                <a:ea typeface="Calibri" pitchFamily="34" charset="-122"/>
+                <a:cs typeface="Calibri" pitchFamily="34" charset="-120"/>
               </a:rPr>
               <a:t>Factores exactos</a:t>
             </a:r>
@@ -9368,8 +10385,11 @@
             <a:r>
               <a:rPr lang="en-US" sz="1400" dirty="0">
                 <a:solidFill>
-                  <a:schemeClr val="tx1"/>
-                </a:solidFill>
+                  <a:srgbClr val="212529"/>
+                </a:solidFill>
+                <a:latin typeface="Calibri" pitchFamily="34" charset="0"/>
+                <a:ea typeface="Calibri" pitchFamily="34" charset="-122"/>
+                <a:cs typeface="Calibri" pitchFamily="34" charset="-120"/>
               </a:rPr>
               <a:t>0.3048 m, 0.45359237 kg… en lugar de aproximaciones</a:t>
             </a:r>
@@ -9394,7 +10414,7 @@
             </a:avLst>
           </a:prstGeom>
           <a:solidFill>
-            <a:schemeClr val="bg2"/>
+            <a:srgbClr val="F3F6F5"/>
           </a:solidFill>
           <a:ln w="12700">
             <a:solidFill>
@@ -9419,11 +10439,11 @@
             <a:avLst/>
           </a:prstGeom>
           <a:solidFill>
-            <a:schemeClr val="accent5"/>
+            <a:srgbClr val="C0392B"/>
           </a:solidFill>
           <a:ln w="12700">
             <a:solidFill>
-              <a:schemeClr val="accent5"/>
+              <a:srgbClr val="C0392B"/>
             </a:solidFill>
             <a:prstDash val="solid"/>
           </a:ln>
@@ -9456,8 +10476,11 @@
             <a:r>
               <a:rPr lang="en-US" sz="1800" b="1" dirty="0">
                 <a:solidFill>
-                  <a:schemeClr val="bg1"/>
-                </a:solidFill>
+                  <a:srgbClr val="FFFFFF"/>
+                </a:solidFill>
+                <a:latin typeface="Calibri" pitchFamily="34" charset="0"/>
+                <a:ea typeface="Calibri" pitchFamily="34" charset="-122"/>
+                <a:cs typeface="Calibri" pitchFamily="34" charset="-120"/>
               </a:rPr>
               <a:t>2</a:t>
             </a:r>
@@ -9492,8 +10515,11 @@
             <a:r>
               <a:rPr lang="en-US" sz="1700" b="1" dirty="0">
                 <a:solidFill>
-                  <a:schemeClr val="tx2"/>
-                </a:solidFill>
+                  <a:srgbClr val="004A38"/>
+                </a:solidFill>
+                <a:latin typeface="Calibri" pitchFamily="34" charset="0"/>
+                <a:ea typeface="Calibri" pitchFamily="34" charset="-122"/>
+                <a:cs typeface="Calibri" pitchFamily="34" charset="-120"/>
               </a:rPr>
               <a:t>Validación en el servidor</a:t>
             </a:r>
@@ -9528,8 +10554,11 @@
             <a:r>
               <a:rPr lang="en-US" sz="1400" dirty="0">
                 <a:solidFill>
-                  <a:schemeClr val="tx1"/>
-                </a:solidFill>
+                  <a:srgbClr val="212529"/>
+                </a:solidFill>
+                <a:latin typeface="Calibri" pitchFamily="34" charset="0"/>
+                <a:ea typeface="Calibri" pitchFamily="34" charset="-122"/>
+                <a:cs typeface="Calibri" pitchFamily="34" charset="-120"/>
               </a:rPr>
               <a:t>Valores imposibles responden SOAP Fault con mensaje claro</a:t>
             </a:r>
@@ -9554,7 +10583,7 @@
             </a:avLst>
           </a:prstGeom>
           <a:solidFill>
-            <a:schemeClr val="bg2"/>
+            <a:srgbClr val="F3F6F5"/>
           </a:solidFill>
           <a:ln w="12700">
             <a:solidFill>
@@ -9579,11 +10608,11 @@
             <a:avLst/>
           </a:prstGeom>
           <a:solidFill>
-            <a:schemeClr val="accent3"/>
+            <a:srgbClr val="1971C2"/>
           </a:solidFill>
           <a:ln w="12700">
             <a:solidFill>
-              <a:schemeClr val="accent3"/>
+              <a:srgbClr val="1971C2"/>
             </a:solidFill>
             <a:prstDash val="solid"/>
           </a:ln>
@@ -9616,8 +10645,11 @@
             <a:r>
               <a:rPr lang="en-US" sz="1800" b="1" dirty="0">
                 <a:solidFill>
-                  <a:schemeClr val="bg1"/>
-                </a:solidFill>
+                  <a:srgbClr val="FFFFFF"/>
+                </a:solidFill>
+                <a:latin typeface="Calibri" pitchFamily="34" charset="0"/>
+                <a:ea typeface="Calibri" pitchFamily="34" charset="-122"/>
+                <a:cs typeface="Calibri" pitchFamily="34" charset="-120"/>
               </a:rPr>
               <a:t>3</a:t>
             </a:r>
@@ -9652,8 +10684,11 @@
             <a:r>
               <a:rPr lang="en-US" sz="1700" b="1" dirty="0">
                 <a:solidFill>
-                  <a:schemeClr val="tx2"/>
-                </a:solidFill>
+                  <a:srgbClr val="004A38"/>
+                </a:solidFill>
+                <a:latin typeface="Calibri" pitchFamily="34" charset="0"/>
+                <a:ea typeface="Calibri" pitchFamily="34" charset="-122"/>
+                <a:cs typeface="Calibri" pitchFamily="34" charset="-120"/>
               </a:rPr>
               <a:t>Servidor configurable</a:t>
             </a:r>
@@ -9688,8 +10723,11 @@
             <a:r>
               <a:rPr lang="en-US" sz="1400" dirty="0">
                 <a:solidFill>
-                  <a:schemeClr val="tx1"/>
-                </a:solidFill>
+                  <a:srgbClr val="212529"/>
+                </a:solidFill>
+                <a:latin typeface="Calibri" pitchFamily="34" charset="0"/>
+                <a:ea typeface="Calibri" pitchFamily="34" charset="-122"/>
+                <a:cs typeface="Calibri" pitchFamily="34" charset="-120"/>
               </a:rPr>
               <a:t>App.config, appsettings.json y ajustes en el móvil: sin recompilar</a:t>
             </a:r>
@@ -9714,7 +10752,7 @@
             </a:avLst>
           </a:prstGeom>
           <a:solidFill>
-            <a:schemeClr val="bg2"/>
+            <a:srgbClr val="F3F6F5"/>
           </a:solidFill>
           <a:ln w="12700">
             <a:solidFill>
@@ -9739,11 +10777,11 @@
             <a:avLst/>
           </a:prstGeom>
           <a:solidFill>
-            <a:schemeClr val="accent2"/>
+            <a:srgbClr val="D65D0E"/>
           </a:solidFill>
           <a:ln w="12700">
             <a:solidFill>
-              <a:schemeClr val="accent2"/>
+              <a:srgbClr val="D65D0E"/>
             </a:solidFill>
             <a:prstDash val="solid"/>
           </a:ln>
@@ -9776,8 +10814,11 @@
             <a:r>
               <a:rPr lang="en-US" sz="1800" b="1" dirty="0">
                 <a:solidFill>
-                  <a:schemeClr val="bg1"/>
-                </a:solidFill>
+                  <a:srgbClr val="FFFFFF"/>
+                </a:solidFill>
+                <a:latin typeface="Calibri" pitchFamily="34" charset="0"/>
+                <a:ea typeface="Calibri" pitchFamily="34" charset="-122"/>
+                <a:cs typeface="Calibri" pitchFamily="34" charset="-120"/>
               </a:rPr>
               <a:t>4</a:t>
             </a:r>
@@ -9812,8 +10853,11 @@
             <a:r>
               <a:rPr lang="en-US" sz="1700" b="1" dirty="0">
                 <a:solidFill>
-                  <a:schemeClr val="tx2"/>
-                </a:solidFill>
+                  <a:srgbClr val="004A38"/>
+                </a:solidFill>
+                <a:latin typeface="Calibri" pitchFamily="34" charset="0"/>
+                <a:ea typeface="Calibri" pitchFamily="34" charset="-122"/>
+                <a:cs typeface="Calibri" pitchFamily="34" charset="-120"/>
               </a:rPr>
               <a:t>Una pantalla para todo</a:t>
             </a:r>
@@ -9848,8 +10892,11 @@
             <a:r>
               <a:rPr lang="en-US" sz="1400" dirty="0">
                 <a:solidFill>
-                  <a:schemeClr val="tx1"/>
-                </a:solidFill>
+                  <a:srgbClr val="212529"/>
+                </a:solidFill>
+                <a:latin typeface="Calibri" pitchFamily="34" charset="0"/>
+                <a:ea typeface="Calibri" pitchFamily="34" charset="-122"/>
+                <a:cs typeface="Calibri" pitchFamily="34" charset="-120"/>
               </a:rPr>
               <a:t>Catálogo de 16 conversiones; la misma vista sirve a las 3 categorías</a:t>
             </a:r>
@@ -9874,7 +10921,7 @@
             </a:avLst>
           </a:prstGeom>
           <a:solidFill>
-            <a:schemeClr val="bg2"/>
+            <a:srgbClr val="F3F6F5"/>
           </a:solidFill>
           <a:ln w="12700">
             <a:solidFill>
@@ -9899,11 +10946,11 @@
             <a:avLst/>
           </a:prstGeom>
           <a:solidFill>
-            <a:schemeClr val="accent4"/>
+            <a:srgbClr val="7C3AAD"/>
           </a:solidFill>
           <a:ln w="12700">
             <a:solidFill>
-              <a:schemeClr val="accent4"/>
+              <a:srgbClr val="7C3AAD"/>
             </a:solidFill>
             <a:prstDash val="solid"/>
           </a:ln>
@@ -9936,8 +10983,11 @@
             <a:r>
               <a:rPr lang="en-US" sz="1800" b="1" dirty="0">
                 <a:solidFill>
-                  <a:schemeClr val="bg1"/>
-                </a:solidFill>
+                  <a:srgbClr val="FFFFFF"/>
+                </a:solidFill>
+                <a:latin typeface="Calibri" pitchFamily="34" charset="0"/>
+                <a:ea typeface="Calibri" pitchFamily="34" charset="-122"/>
+                <a:cs typeface="Calibri" pitchFamily="34" charset="-120"/>
               </a:rPr>
               <a:t>5</a:t>
             </a:r>
@@ -9972,8 +11022,11 @@
             <a:r>
               <a:rPr lang="en-US" sz="1700" b="1" dirty="0">
                 <a:solidFill>
-                  <a:schemeClr val="tx2"/>
-                </a:solidFill>
+                  <a:srgbClr val="004A38"/>
+                </a:solidFill>
+                <a:latin typeface="Calibri" pitchFamily="34" charset="0"/>
+                <a:ea typeface="Calibri" pitchFamily="34" charset="-122"/>
+                <a:cs typeface="Calibri" pitchFamily="34" charset="-120"/>
               </a:rPr>
               <a:t>Clientes que no se congelan</a:t>
             </a:r>
@@ -10008,8 +11061,11 @@
             <a:r>
               <a:rPr lang="en-US" sz="1400" dirty="0">
                 <a:solidFill>
-                  <a:schemeClr val="tx1"/>
-                </a:solidFill>
+                  <a:srgbClr val="212529"/>
+                </a:solidFill>
+                <a:latin typeface="Calibri" pitchFamily="34" charset="0"/>
+                <a:ea typeface="Calibri" pitchFamily="34" charset="-122"/>
+                <a:cs typeface="Calibri" pitchFamily="34" charset="-120"/>
               </a:rPr>
               <a:t>Llamadas asíncronas en escritorio, web y móvil</a:t>
             </a:r>
@@ -10034,7 +11090,7 @@
             </a:avLst>
           </a:prstGeom>
           <a:solidFill>
-            <a:schemeClr val="bg2"/>
+            <a:srgbClr val="F3F6F5"/>
           </a:solidFill>
           <a:ln w="12700">
             <a:solidFill>
@@ -10059,11 +11115,11 @@
             <a:avLst/>
           </a:prstGeom>
           <a:solidFill>
-            <a:schemeClr val="accent6"/>
+            <a:srgbClr val="6C757D"/>
           </a:solidFill>
           <a:ln w="12700">
             <a:solidFill>
-              <a:schemeClr val="accent6"/>
+              <a:srgbClr val="6C757D"/>
             </a:solidFill>
             <a:prstDash val="solid"/>
           </a:ln>
@@ -10096,8 +11152,11 @@
             <a:r>
               <a:rPr lang="en-US" sz="1800" b="1" dirty="0">
                 <a:solidFill>
-                  <a:schemeClr val="bg1"/>
-                </a:solidFill>
+                  <a:srgbClr val="FFFFFF"/>
+                </a:solidFill>
+                <a:latin typeface="Calibri" pitchFamily="34" charset="0"/>
+                <a:ea typeface="Calibri" pitchFamily="34" charset="-122"/>
+                <a:cs typeface="Calibri" pitchFamily="34" charset="-120"/>
               </a:rPr>
               <a:t>6</a:t>
             </a:r>
@@ -10132,10 +11191,13 @@
             <a:r>
               <a:rPr lang="en-US" sz="1700" b="1" dirty="0">
                 <a:solidFill>
-                  <a:schemeClr val="tx2"/>
-                </a:solidFill>
-              </a:rPr>
-              <a:t>Móvil sin librerías SOAP</a:t>
+                  <a:srgbClr val="004A38"/>
+                </a:solidFill>
+                <a:latin typeface="Calibri" pitchFamily="34" charset="0"/>
+                <a:ea typeface="Calibri" pitchFamily="34" charset="-122"/>
+                <a:cs typeface="Calibri" pitchFamily="34" charset="-120"/>
+              </a:rPr>
+              <a:t>Patrón Singleton</a:t>
             </a:r>
             <a:endParaRPr lang="en-US" sz="1700" dirty="0"/>
           </a:p>
@@ -10168,10 +11230,13 @@
             <a:r>
               <a:rPr lang="en-US" sz="1400" dirty="0">
                 <a:solidFill>
-                  <a:schemeClr val="tx1"/>
-                </a:solidFill>
-              </a:rPr>
-              <a:t>HttpURLConnection + XmlPullParser en lugar de ksoap2</a:t>
+                  <a:srgbClr val="212529"/>
+                </a:solidFill>
+                <a:latin typeface="Calibri" pitchFamily="34" charset="0"/>
+                <a:ea typeface="Calibri" pitchFamily="34" charset="-122"/>
+                <a:cs typeface="Calibri" pitchFamily="34" charset="-120"/>
+              </a:rPr>
+              <a:t>Una sola instancia de Autenticador, ClienteConversion y ClienteSoap</a:t>
             </a:r>
             <a:endParaRPr lang="en-US" sz="1400" dirty="0"/>
           </a:p>
@@ -10207,7 +11272,7 @@
             <a:lvl1pPr>
               <a:defRPr sz="1000">
                 <a:solidFill>
-                  <a:schemeClr val="accent6"/>
+                  <a:srgbClr val="6C757D"/>
                 </a:solidFill>
               </a:defRPr>
             </a:lvl1pPr>
@@ -10276,8 +11341,11 @@
             <a:r>
               <a:rPr lang="en-US" sz="3400" b="1" dirty="0">
                 <a:solidFill>
-                  <a:schemeClr val="tx2"/>
-                </a:solidFill>
+                  <a:srgbClr val="004A38"/>
+                </a:solidFill>
+                <a:latin typeface="Calibri" pitchFamily="34" charset="0"/>
+                <a:ea typeface="Calibri" pitchFamily="34" charset="-122"/>
+                <a:cs typeface="Calibri" pitchFamily="34" charset="-120"/>
               </a:rPr>
               <a:t>Cliente de consola · CLICON</a:t>
             </a:r>
@@ -10312,8 +11380,11 @@
             <a:r>
               <a:rPr lang="en-US" sz="1600" b="1" dirty="0">
                 <a:solidFill>
-                  <a:schemeClr val="tx2"/>
-                </a:solidFill>
+                  <a:srgbClr val="004A38"/>
+                </a:solidFill>
+                <a:latin typeface="Calibri" pitchFamily="34" charset="0"/>
+                <a:ea typeface="Calibri" pitchFamily="34" charset="-122"/>
+                <a:cs typeface="Calibri" pitchFamily="34" charset="-120"/>
               </a:rPr>
               <a:t>.NET Framework 4.7.2 · ChannelFactory · MVC</a:t>
             </a:r>
@@ -10352,10 +11423,13 @@
             <a:r>
               <a:rPr lang="en-US" sz="1500" dirty="0">
                 <a:solidFill>
-                  <a:schemeClr val="tx1"/>
-                </a:solidFill>
-              </a:rPr>
-              <a:t>Login con clave oculta y 3 intentos</a:t>
+                  <a:srgbClr val="212529"/>
+                </a:solidFill>
+                <a:latin typeface="Calibri" pitchFamily="34" charset="0"/>
+                <a:ea typeface="Calibri" pitchFamily="34" charset="-122"/>
+                <a:cs typeface="Calibri" pitchFamily="34" charset="-120"/>
+              </a:rPr>
+              <a:t>Login con clave oculta (los 3 intentos los cuenta el servidor)</a:t>
             </a:r>
             <a:endParaRPr lang="en-US" sz="1500" dirty="0"/>
           </a:p>
@@ -10370,8 +11444,11 @@
             <a:r>
               <a:rPr lang="en-US" sz="1500" dirty="0">
                 <a:solidFill>
-                  <a:schemeClr val="tx1"/>
-                </a:solidFill>
+                  <a:srgbClr val="212529"/>
+                </a:solidFill>
+                <a:latin typeface="Calibri" pitchFamily="34" charset="0"/>
+                <a:ea typeface="Calibri" pitchFamily="34" charset="-122"/>
+                <a:cs typeface="Calibri" pitchFamily="34" charset="-120"/>
               </a:rPr>
               <a:t>Menú de categorías y conversiones</a:t>
             </a:r>
@@ -10388,8 +11465,11 @@
             <a:r>
               <a:rPr lang="en-US" sz="1500" dirty="0">
                 <a:solidFill>
-                  <a:schemeClr val="tx1"/>
-                </a:solidFill>
+                  <a:srgbClr val="212529"/>
+                </a:solidFill>
+                <a:latin typeface="Calibri" pitchFamily="34" charset="0"/>
+                <a:ea typeface="Calibri" pitchFamily="34" charset="-122"/>
+                <a:cs typeface="Calibri" pitchFamily="34" charset="-120"/>
               </a:rPr>
               <a:t>Acepta coma o punto decimal</a:t>
             </a:r>
@@ -10406,8 +11486,11 @@
             <a:r>
               <a:rPr lang="en-US" sz="1500" dirty="0">
                 <a:solidFill>
-                  <a:schemeClr val="tx1"/>
-                </a:solidFill>
+                  <a:srgbClr val="212529"/>
+                </a:solidFill>
+                <a:latin typeface="Calibri" pitchFamily="34" charset="0"/>
+                <a:ea typeface="Calibri" pitchFamily="34" charset="-122"/>
+                <a:cs typeface="Calibri" pitchFamily="34" charset="-120"/>
               </a:rPr>
               <a:t>Mensajes en colores: verde éxito, rojo error</a:t>
             </a:r>
@@ -10424,8 +11507,11 @@
             <a:r>
               <a:rPr lang="en-US" sz="1500" dirty="0">
                 <a:solidFill>
-                  <a:schemeClr val="tx1"/>
-                </a:solidFill>
+                  <a:srgbClr val="212529"/>
+                </a:solidFill>
+                <a:latin typeface="Calibri" pitchFamily="34" charset="0"/>
+                <a:ea typeface="Calibri" pitchFamily="34" charset="-122"/>
+                <a:cs typeface="Calibri" pitchFamily="34" charset="-120"/>
               </a:rPr>
               <a:t>URL del servidor en App.config</a:t>
             </a:r>
@@ -10448,7 +11534,7 @@
             <a:avLst/>
           </a:prstGeom>
           <a:solidFill>
-            <a:schemeClr val="bg1"/>
+            <a:srgbClr val="FFFFFF"/>
           </a:solidFill>
           <a:ln w="12700">
             <a:solidFill>
@@ -10504,7 +11590,7 @@
             <a:avLst/>
           </a:prstGeom>
           <a:solidFill>
-            <a:schemeClr val="bg1"/>
+            <a:srgbClr val="FFFFFF"/>
           </a:solidFill>
           <a:ln w="12700">
             <a:solidFill>
@@ -10575,7 +11661,7 @@
             <a:lvl1pPr>
               <a:defRPr sz="1000">
                 <a:solidFill>
-                  <a:schemeClr val="accent6"/>
+                  <a:srgbClr val="6C757D"/>
                 </a:solidFill>
               </a:defRPr>
             </a:lvl1pPr>
@@ -10644,8 +11730,11 @@
             <a:r>
               <a:rPr lang="en-US" sz="3400" b="1" dirty="0">
                 <a:solidFill>
-                  <a:schemeClr val="tx2"/>
-                </a:solidFill>
+                  <a:srgbClr val="004A38"/>
+                </a:solidFill>
+                <a:latin typeface="Calibri" pitchFamily="34" charset="0"/>
+                <a:ea typeface="Calibri" pitchFamily="34" charset="-122"/>
+                <a:cs typeface="Calibri" pitchFamily="34" charset="-120"/>
               </a:rPr>
               <a:t>Cliente de escritorio · CLIESC</a:t>
             </a:r>
@@ -10680,8 +11769,11 @@
             <a:r>
               <a:rPr lang="en-US" sz="1600" b="1" dirty="0">
                 <a:solidFill>
-                  <a:schemeClr val="accent2"/>
-                </a:solidFill>
+                  <a:srgbClr val="D65D0E"/>
+                </a:solidFill>
+                <a:latin typeface="Calibri" pitchFamily="34" charset="0"/>
+                <a:ea typeface="Calibri" pitchFamily="34" charset="-122"/>
+                <a:cs typeface="Calibri" pitchFamily="34" charset="-120"/>
               </a:rPr>
               <a:t>Windows Forms · .NET Framework 4.7.2 · llamadas asíncronas</a:t>
             </a:r>
@@ -10720,8 +11812,11 @@
             <a:r>
               <a:rPr lang="en-US" sz="1500" dirty="0">
                 <a:solidFill>
-                  <a:schemeClr val="tx1"/>
-                </a:solidFill>
+                  <a:srgbClr val="212529"/>
+                </a:solidFill>
+                <a:latin typeface="Calibri" pitchFamily="34" charset="0"/>
+                <a:ea typeface="Calibri" pitchFamily="34" charset="-122"/>
+                <a:cs typeface="Calibri" pitchFamily="34" charset="-120"/>
               </a:rPr>
               <a:t>Menú lateral con color por categoría</a:t>
             </a:r>
@@ -10738,8 +11833,11 @@
             <a:r>
               <a:rPr lang="en-US" sz="1500" dirty="0">
                 <a:solidFill>
-                  <a:schemeClr val="tx1"/>
-                </a:solidFill>
+                  <a:srgbClr val="212529"/>
+                </a:solidFill>
+                <a:latin typeface="Calibri" pitchFamily="34" charset="0"/>
+                <a:ea typeface="Calibri" pitchFamily="34" charset="-122"/>
+                <a:cs typeface="Calibri" pitchFamily="34" charset="-120"/>
               </a:rPr>
               <a:t>Listas De / A: solo destinos válidos</a:t>
             </a:r>
@@ -10756,8 +11854,11 @@
             <a:r>
               <a:rPr lang="en-US" sz="1500" dirty="0">
                 <a:solidFill>
-                  <a:schemeClr val="tx1"/>
-                </a:solidFill>
+                  <a:srgbClr val="212529"/>
+                </a:solidFill>
+                <a:latin typeface="Calibri" pitchFamily="34" charset="0"/>
+                <a:ea typeface="Calibri" pitchFamily="34" charset="-122"/>
+                <a:cs typeface="Calibri" pitchFamily="34" charset="-120"/>
               </a:rPr>
               <a:t>Botón ⇄ para intercambiar unidades</a:t>
             </a:r>
@@ -10774,8 +11875,11 @@
             <a:r>
               <a:rPr lang="en-US" sz="1500" dirty="0">
                 <a:solidFill>
-                  <a:schemeClr val="tx1"/>
-                </a:solidFill>
+                  <a:srgbClr val="212529"/>
+                </a:solidFill>
+                <a:latin typeface="Calibri" pitchFamily="34" charset="0"/>
+                <a:ea typeface="Calibri" pitchFamily="34" charset="-122"/>
+                <a:cs typeface="Calibri" pitchFamily="34" charset="-120"/>
               </a:rPr>
               <a:t>Historial de la sesión</a:t>
             </a:r>
@@ -10792,8 +11896,11 @@
             <a:r>
               <a:rPr lang="en-US" sz="1500" dirty="0">
                 <a:solidFill>
-                  <a:schemeClr val="tx1"/>
-                </a:solidFill>
+                  <a:srgbClr val="212529"/>
+                </a:solidFill>
+                <a:latin typeface="Calibri" pitchFamily="34" charset="0"/>
+                <a:ea typeface="Calibri" pitchFamily="34" charset="-122"/>
+                <a:cs typeface="Calibri" pitchFamily="34" charset="-120"/>
               </a:rPr>
               <a:t>Errores en rojo dentro de la pantalla</a:t>
             </a:r>
@@ -10816,7 +11923,7 @@
             <a:avLst/>
           </a:prstGeom>
           <a:solidFill>
-            <a:schemeClr val="bg1"/>
+            <a:srgbClr val="FFFFFF"/>
           </a:solidFill>
           <a:ln w="12700">
             <a:solidFill>
@@ -10887,7 +11994,7 @@
             <a:lvl1pPr>
               <a:defRPr sz="1000">
                 <a:solidFill>
-                  <a:schemeClr val="accent6"/>
+                  <a:srgbClr val="6C757D"/>
                 </a:solidFill>
               </a:defRPr>
             </a:lvl1pPr>
@@ -10956,8 +12063,11 @@
             <a:r>
               <a:rPr lang="en-US" sz="3400" b="1" dirty="0">
                 <a:solidFill>
-                  <a:schemeClr val="tx2"/>
-                </a:solidFill>
+                  <a:srgbClr val="004A38"/>
+                </a:solidFill>
+                <a:latin typeface="Calibri" pitchFamily="34" charset="0"/>
+                <a:ea typeface="Calibri" pitchFamily="34" charset="-122"/>
+                <a:cs typeface="Calibri" pitchFamily="34" charset="-120"/>
               </a:rPr>
               <a:t>Cliente web · CLIWEB</a:t>
             </a:r>
@@ -10992,8 +12102,11 @@
             <a:r>
               <a:rPr lang="en-US" sz="1600" b="1" dirty="0">
                 <a:solidFill>
-                  <a:schemeClr val="accent3"/>
-                </a:solidFill>
+                  <a:srgbClr val="1971C2"/>
+                </a:solidFill>
+                <a:latin typeface="Calibri" pitchFamily="34" charset="0"/>
+                <a:ea typeface="Calibri" pitchFamily="34" charset="-122"/>
+                <a:cs typeface="Calibri" pitchFamily="34" charset="-120"/>
               </a:rPr>
               <a:t>ASP.NET Core MVC · .NET 8 · System.ServiceModel.Http</a:t>
             </a:r>
@@ -11032,8 +12145,11 @@
             <a:r>
               <a:rPr lang="en-US" sz="1500" dirty="0">
                 <a:solidFill>
-                  <a:schemeClr val="tx1"/>
-                </a:solidFill>
+                  <a:srgbClr val="212529"/>
+                </a:solidFill>
+                <a:latin typeface="Calibri" pitchFamily="34" charset="0"/>
+                <a:ea typeface="Calibri" pitchFamily="34" charset="-122"/>
+                <a:cs typeface="Calibri" pitchFamily="34" charset="-120"/>
               </a:rPr>
               <a:t>Sesión: sin login no se entra a /Conversion</a:t>
             </a:r>
@@ -11050,8 +12166,11 @@
             <a:r>
               <a:rPr lang="en-US" sz="1500" dirty="0">
                 <a:solidFill>
-                  <a:schemeClr val="tx1"/>
-                </a:solidFill>
+                  <a:srgbClr val="212529"/>
+                </a:solidFill>
+                <a:latin typeface="Calibri" pitchFamily="34" charset="0"/>
+                <a:ea typeface="Calibri" pitchFamily="34" charset="-122"/>
+                <a:cs typeface="Calibri" pitchFamily="34" charset="-120"/>
               </a:rPr>
               <a:t>Contrato asíncrono (Task&lt;double&gt;)</a:t>
             </a:r>
@@ -11068,8 +12187,11 @@
             <a:r>
               <a:rPr lang="en-US" sz="1500" dirty="0">
                 <a:solidFill>
-                  <a:schemeClr val="tx1"/>
-                </a:solidFill>
+                  <a:srgbClr val="212529"/>
+                </a:solidFill>
+                <a:latin typeface="Calibri" pitchFamily="34" charset="0"/>
+                <a:ea typeface="Calibri" pitchFamily="34" charset="-122"/>
+                <a:cs typeface="Calibri" pitchFamily="34" charset="-120"/>
               </a:rPr>
               <a:t>Token antifalsificación en formularios</a:t>
             </a:r>
@@ -11086,8 +12208,11 @@
             <a:r>
               <a:rPr lang="en-US" sz="1500" dirty="0">
                 <a:solidFill>
-                  <a:schemeClr val="tx1"/>
-                </a:solidFill>
+                  <a:srgbClr val="212529"/>
+                </a:solidFill>
+                <a:latin typeface="Calibri" pitchFamily="34" charset="0"/>
+                <a:ea typeface="Calibri" pitchFamily="34" charset="-122"/>
+                <a:cs typeface="Calibri" pitchFamily="34" charset="-120"/>
               </a:rPr>
               <a:t>Historial guardado en la sesión</a:t>
             </a:r>
@@ -11104,8 +12229,11 @@
             <a:r>
               <a:rPr lang="en-US" sz="1500" dirty="0">
                 <a:solidFill>
-                  <a:schemeClr val="tx1"/>
-                </a:solidFill>
+                  <a:srgbClr val="212529"/>
+                </a:solidFill>
+                <a:latin typeface="Calibri" pitchFamily="34" charset="0"/>
+                <a:ea typeface="Calibri" pitchFamily="34" charset="-122"/>
+                <a:cs typeface="Calibri" pitchFamily="34" charset="-120"/>
               </a:rPr>
               <a:t>Diseño adaptable a celular</a:t>
             </a:r>
@@ -11128,7 +12256,7 @@
             <a:avLst/>
           </a:prstGeom>
           <a:solidFill>
-            <a:schemeClr val="bg1"/>
+            <a:srgbClr val="FFFFFF"/>
           </a:solidFill>
           <a:ln w="12700">
             <a:solidFill>
@@ -11184,7 +12312,7 @@
             <a:avLst/>
           </a:prstGeom>
           <a:solidFill>
-            <a:schemeClr val="bg1"/>
+            <a:srgbClr val="FFFFFF"/>
           </a:solidFill>
           <a:ln w="12700">
             <a:solidFill>
@@ -11255,7 +12383,7 @@
             <a:lvl1pPr>
               <a:defRPr sz="1000">
                 <a:solidFill>
-                  <a:schemeClr val="accent6"/>
+                  <a:srgbClr val="6C757D"/>
                 </a:solidFill>
               </a:defRPr>
             </a:lvl1pPr>
@@ -11279,47 +12407,47 @@
 </file>
 
 <file path=ppt/theme/theme1.xml><?xml version="1.0" encoding="utf-8"?>
-<a:theme xmlns:a="http://schemas.openxmlformats.org/drawingml/2006/main" name="Conversor ESPE">
+<a:theme xmlns:a="http://schemas.openxmlformats.org/drawingml/2006/main" name="Office Theme">
   <a:themeElements>
-    <a:clrScheme name="Conversor ESPE">
+    <a:clrScheme name="Office">
       <a:dk1>
-        <a:srgbClr val="212529"/>
+        <a:sysClr val="windowText" lastClr="000000"/>
       </a:dk1>
       <a:lt1>
-        <a:srgbClr val="FFFFFF"/>
+        <a:sysClr val="window" lastClr="FFFFFF"/>
       </a:lt1>
       <a:dk2>
-        <a:srgbClr val="004A38"/>
+        <a:srgbClr val="44546A"/>
       </a:dk2>
       <a:lt2>
-        <a:srgbClr val="F3F6F5"/>
+        <a:srgbClr val="E7E6E6"/>
       </a:lt2>
       <a:accent1>
-        <a:srgbClr val="006950"/>
+        <a:srgbClr val="4472C4"/>
       </a:accent1>
       <a:accent2>
-        <a:srgbClr val="D65D0E"/>
+        <a:srgbClr val="ED7D31"/>
       </a:accent2>
       <a:accent3>
-        <a:srgbClr val="1971C2"/>
+        <a:srgbClr val="A5A5A5"/>
       </a:accent3>
       <a:accent4>
-        <a:srgbClr val="7C3AAD"/>
+        <a:srgbClr val="FFC000"/>
       </a:accent4>
       <a:accent5>
-        <a:srgbClr val="C0392B"/>
+        <a:srgbClr val="5B9BD5"/>
       </a:accent5>
       <a:accent6>
-        <a:srgbClr val="6C757D"/>
+        <a:srgbClr val="70AD47"/>
       </a:accent6>
       <a:hlink>
-        <a:srgbClr val="1971C2"/>
+        <a:srgbClr val="0563C1"/>
       </a:hlink>
       <a:folHlink>
-        <a:srgbClr val="7C3AAD"/>
+        <a:srgbClr val="954F72"/>
       </a:folHlink>
     </a:clrScheme>
-    <a:fontScheme name="Conversor ESPE">
+    <a:fontScheme name="Office">
       <a:majorFont>
         <a:latin typeface="Calibri"/>
         <a:ea typeface=""/>
